--- a/exports/lotusbio_tti_demo.pptx
+++ b/exports/lotusbio_tti_demo.pptx
@@ -9,9 +9,10 @@
     <p:sldId id="257" r:id="rId3"/>
     <p:sldId id="258" r:id="rId4"/>
     <p:sldId id="259" r:id="rId5"/>
+    <p:sldId id="260" r:id="rId6"/>
   </p:sldIdLst>
   <p:notesMasterIdLst>
-    <p:notesMasterId r:id="rId6"/>
+    <p:notesMasterId r:id="rId7"/>
   </p:notesMasterIdLst>
   <p:sldSz cx="12192000" cy="6858000"/>
   <p:notesSz cx="6858000" cy="12192000"/>
@@ -793,6 +794,94 @@
             <a:fld id="{F7021451-1387-4CA6-816F-3879F97B5CBC}" type="slidenum">
               <a:rPr lang="en-US"/>
               <a:t>4</a:t>
+            </a:fld>
+            <a:endParaRPr lang="en-US"/>
+          </a:p>
+        </p:txBody>
+      </p:sp>
+    </p:spTree>
+    <p:extLst>
+      <p:ext uri="{BB962C8B-B14F-4D97-AF65-F5344CB8AC3E}">
+        <p14:creationId xmlns:p14="http://schemas.microsoft.com/office/powerpoint/2010/main" val="1024086991"/>
+      </p:ext>
+    </p:extLst>
+  </p:cSld>
+  <p:clrMapOvr>
+    <a:masterClrMapping/>
+  </p:clrMapOvr>
+</p:notes>
+</file>
+
+<file path=ppt/notesSlides/notesSlide5.xml><?xml version="1.0" encoding="utf-8"?>
+<p:notes xmlns:a="http://schemas.openxmlformats.org/drawingml/2006/main" xmlns:r="http://schemas.openxmlformats.org/officeDocument/2006/relationships" xmlns:p="http://schemas.openxmlformats.org/presentationml/2006/main">
+  <p:cSld>
+    <p:spTree>
+      <p:nvGrpSpPr>
+        <p:cNvPr id="1" name=""/>
+        <p:cNvGrpSpPr/>
+        <p:nvPr/>
+      </p:nvGrpSpPr>
+      <p:grpSpPr>
+        <a:xfrm>
+          <a:off x="0" y="0"/>
+          <a:ext cx="0" cy="0"/>
+          <a:chOff x="0" y="0"/>
+          <a:chExt cx="0" cy="0"/>
+        </a:xfrm>
+      </p:grpSpPr>
+      <p:sp>
+        <p:nvSpPr>
+          <p:cNvPr id="2" name="Slide Image Placeholder 1"/>
+          <p:cNvSpPr>
+            <a:spLocks noGrp="1" noRot="1" noChangeAspect="1"/>
+          </p:cNvSpPr>
+          <p:nvPr>
+            <p:ph type="sldImg"/>
+          </p:nvPr>
+        </p:nvSpPr>
+        <p:spPr/>
+      </p:sp>
+      <p:sp>
+        <p:nvSpPr>
+          <p:cNvPr id="3" name="Notes Placeholder 2"/>
+          <p:cNvSpPr>
+            <a:spLocks noGrp="1"/>
+          </p:cNvSpPr>
+          <p:nvPr>
+            <p:ph type="body" idx="1"/>
+          </p:nvPr>
+        </p:nvSpPr>
+        <p:spPr/>
+        <p:txBody>
+          <a:bodyPr/>
+          <a:lstStyle/>
+          <a:p>
+            <a:r>
+              <a:rPr lang="en-US" dirty="0"/>
+              <a:t/>
+            </a:r>
+            <a:endParaRPr lang="en-US" dirty="0"/>
+          </a:p>
+        </p:txBody>
+      </p:sp>
+      <p:sp>
+        <p:nvSpPr>
+          <p:cNvPr id="4" name="Slide Number Placeholder 3"/>
+          <p:cNvSpPr>
+            <a:spLocks noGrp="1"/>
+          </p:cNvSpPr>
+          <p:nvPr>
+            <p:ph type="sldNum" sz="quarter" idx="10"/>
+          </p:nvPr>
+        </p:nvSpPr>
+        <p:spPr/>
+        <p:txBody>
+          <a:bodyPr/>
+          <a:lstStyle/>
+          <a:p>
+            <a:fld id="{F7021451-1387-4CA6-816F-3879F97B5CBC}" type="slidenum">
+              <a:rPr lang="en-US"/>
+              <a:t>5</a:t>
             </a:fld>
             <a:endParaRPr lang="en-US"/>
           </a:p>
@@ -2395,7 +2484,7 @@
                 <a:ea typeface="Malgun Gothic" pitchFamily="34" charset="-122"/>
                 <a:cs typeface="Malgun Gothic" pitchFamily="34" charset="-120"/>
               </a:rPr>
-              <a:t>p.1 / 4</a:t>
+              <a:t>1 / 5</a:t>
             </a:r>
             <a:endParaRPr lang="en-US" sz="900" dirty="0"/>
           </a:p>
@@ -2569,7 +2658,7 @@
                 <a:ea typeface="Malgun Gothic" pitchFamily="34" charset="-122"/>
                 <a:cs typeface="Malgun Gothic" pitchFamily="34" charset="-120"/>
               </a:rPr>
-              <a:t>2 / 4</a:t>
+              <a:t>2 / 5</a:t>
             </a:r>
             <a:endParaRPr lang="en-US" sz="900" dirty="0"/>
           </a:p>
@@ -4405,7 +4494,7 @@
                 <a:ea typeface="Malgun Gothic" pitchFamily="34" charset="-122"/>
                 <a:cs typeface="Malgun Gothic" pitchFamily="34" charset="-120"/>
               </a:rPr>
-              <a:t>3 / 4</a:t>
+              <a:t>3 / 5</a:t>
             </a:r>
             <a:endParaRPr lang="en-US" sz="900" dirty="0"/>
           </a:p>
@@ -6640,7 +6729,7 @@
                 <a:ea typeface="Malgun Gothic" pitchFamily="34" charset="-122"/>
                 <a:cs typeface="Malgun Gothic" pitchFamily="34" charset="-120"/>
               </a:rPr>
-              <a:t>4 / 4</a:t>
+              <a:t>4 / 5</a:t>
             </a:r>
             <a:endParaRPr lang="en-US" sz="900" dirty="0"/>
           </a:p>
@@ -8846,6 +8935,1995 @@
               <a:t>B2B 파일럿</a:t>
             </a:r>
             <a:endParaRPr lang="en-US" sz="950" dirty="0"/>
+          </a:p>
+        </p:txBody>
+      </p:sp>
+    </p:spTree>
+  </p:cSld>
+  <p:clrMapOvr>
+    <a:masterClrMapping/>
+  </p:clrMapOvr>
+</p:sld>
+</file>
+
+<file path=ppt/slides/slide5.xml><?xml version="1.0" encoding="utf-8"?>
+<p:sld xmlns:a="http://schemas.openxmlformats.org/drawingml/2006/main" xmlns:r="http://schemas.openxmlformats.org/officeDocument/2006/relationships" xmlns:p="http://schemas.openxmlformats.org/presentationml/2006/main">
+  <p:cSld name="Slide 5">
+    <p:bg>
+      <p:bgPr>
+        <a:solidFill>
+          <a:srgbClr val="FFFFFF"/>
+        </a:solidFill>
+      </p:bgPr>
+    </p:bg>
+    <p:spTree>
+      <p:nvGrpSpPr>
+        <p:cNvPr id="1" name=""/>
+        <p:cNvGrpSpPr/>
+        <p:nvPr/>
+      </p:nvGrpSpPr>
+      <p:grpSpPr>
+        <a:xfrm>
+          <a:off x="0" y="0"/>
+          <a:ext cx="0" cy="0"/>
+          <a:chOff x="0" y="0"/>
+          <a:chExt cx="0" cy="0"/>
+        </a:xfrm>
+      </p:grpSpPr>
+      <p:sp>
+        <p:nvSpPr>
+          <p:cNvPr id="2" name="Shape 0"/>
+          <p:cNvSpPr/>
+          <p:nvPr/>
+        </p:nvSpPr>
+        <p:spPr>
+          <a:xfrm>
+            <a:off x="0" y="0"/>
+            <a:ext cx="12191695" cy="45720"/>
+          </a:xfrm>
+          <a:prstGeom prst="rect">
+            <a:avLst/>
+          </a:prstGeom>
+          <a:solidFill>
+            <a:srgbClr val="0E5C8A"/>
+          </a:solidFill>
+          <a:ln w="12700">
+            <a:solidFill>
+              <a:srgbClr val="0E5C8A"/>
+            </a:solidFill>
+            <a:prstDash val="solid"/>
+          </a:ln>
+        </p:spPr>
+      </p:sp>
+      <p:sp>
+        <p:nvSpPr>
+          <p:cNvPr id="3" name="Text 1"/>
+          <p:cNvSpPr/>
+          <p:nvPr/>
+        </p:nvSpPr>
+        <p:spPr>
+          <a:xfrm>
+            <a:off x="365760" y="164592"/>
+            <a:ext cx="3657600" cy="274320"/>
+          </a:xfrm>
+          <a:prstGeom prst="rect">
+            <a:avLst/>
+          </a:prstGeom>
+          <a:noFill/>
+          <a:ln/>
+        </p:spPr>
+        <p:txBody>
+          <a:bodyPr wrap="square" rtlCol="0" anchor="ctr"/>
+          <a:lstStyle/>
+          <a:p>
+            <a:pPr indent="0" marL="0">
+              <a:buNone/>
+            </a:pPr>
+            <a:r>
+              <a:rPr lang="en-US" sz="1000" dirty="0">
+                <a:solidFill>
+                  <a:srgbClr val="6B7785"/>
+                </a:solidFill>
+                <a:latin typeface="Malgun Gothic" pitchFamily="34" charset="0"/>
+                <a:ea typeface="Malgun Gothic" pitchFamily="34" charset="-122"/>
+                <a:cs typeface="Malgun Gothic" pitchFamily="34" charset="-120"/>
+              </a:rPr>
+              <a:t>Lotusbio · TTI AI Scanner</a:t>
+            </a:r>
+            <a:endParaRPr lang="en-US" sz="1000" dirty="0"/>
+          </a:p>
+        </p:txBody>
+      </p:sp>
+      <p:sp>
+        <p:nvSpPr>
+          <p:cNvPr id="4" name="Text 2"/>
+          <p:cNvSpPr/>
+          <p:nvPr/>
+        </p:nvSpPr>
+        <p:spPr>
+          <a:xfrm>
+            <a:off x="8991295" y="164592"/>
+            <a:ext cx="2834640" cy="274320"/>
+          </a:xfrm>
+          <a:prstGeom prst="rect">
+            <a:avLst/>
+          </a:prstGeom>
+          <a:noFill/>
+          <a:ln/>
+        </p:spPr>
+        <p:txBody>
+          <a:bodyPr wrap="square" rtlCol="0" anchor="ctr"/>
+          <a:lstStyle/>
+          <a:p>
+            <a:pPr algn="r" indent="0" marL="0">
+              <a:buNone/>
+            </a:pPr>
+            <a:r>
+              <a:rPr lang="en-US" sz="1000" spc="200" kern="0" dirty="0">
+                <a:solidFill>
+                  <a:srgbClr val="6B7785"/>
+                </a:solidFill>
+                <a:latin typeface="Malgun Gothic" pitchFamily="34" charset="0"/>
+                <a:ea typeface="Malgun Gothic" pitchFamily="34" charset="-122"/>
+                <a:cs typeface="Malgun Gothic" pitchFamily="34" charset="-120"/>
+              </a:rPr>
+              <a:t>INVESTOR DECK · 2026</a:t>
+            </a:r>
+            <a:endParaRPr lang="en-US" sz="1000" dirty="0"/>
+          </a:p>
+        </p:txBody>
+      </p:sp>
+      <p:sp>
+        <p:nvSpPr>
+          <p:cNvPr id="5" name="Text 3"/>
+          <p:cNvSpPr/>
+          <p:nvPr/>
+        </p:nvSpPr>
+        <p:spPr>
+          <a:xfrm>
+            <a:off x="11277295" y="6492240"/>
+            <a:ext cx="548640" cy="274320"/>
+          </a:xfrm>
+          <a:prstGeom prst="rect">
+            <a:avLst/>
+          </a:prstGeom>
+          <a:noFill/>
+          <a:ln/>
+        </p:spPr>
+        <p:txBody>
+          <a:bodyPr wrap="square" rtlCol="0" anchor="ctr"/>
+          <a:lstStyle/>
+          <a:p>
+            <a:pPr algn="r" indent="0" marL="0">
+              <a:buNone/>
+            </a:pPr>
+            <a:r>
+              <a:rPr lang="en-US" sz="900" dirty="0">
+                <a:solidFill>
+                  <a:srgbClr val="6B7785"/>
+                </a:solidFill>
+                <a:latin typeface="Malgun Gothic" pitchFamily="34" charset="0"/>
+                <a:ea typeface="Malgun Gothic" pitchFamily="34" charset="-122"/>
+                <a:cs typeface="Malgun Gothic" pitchFamily="34" charset="-120"/>
+              </a:rPr>
+              <a:t>5 / 5</a:t>
+            </a:r>
+            <a:endParaRPr lang="en-US" sz="900" dirty="0"/>
+          </a:p>
+        </p:txBody>
+      </p:sp>
+      <p:sp>
+        <p:nvSpPr>
+          <p:cNvPr id="6" name="Text 4"/>
+          <p:cNvSpPr/>
+          <p:nvPr/>
+        </p:nvSpPr>
+        <p:spPr>
+          <a:xfrm>
+            <a:off x="457200" y="502920"/>
+            <a:ext cx="11277295" cy="548640"/>
+          </a:xfrm>
+          <a:prstGeom prst="rect">
+            <a:avLst/>
+          </a:prstGeom>
+          <a:noFill/>
+          <a:ln/>
+        </p:spPr>
+        <p:txBody>
+          <a:bodyPr wrap="square" rtlCol="0" anchor="ctr"/>
+          <a:lstStyle/>
+          <a:p>
+            <a:pPr indent="0" marL="0">
+              <a:buNone/>
+            </a:pPr>
+            <a:r>
+              <a:rPr lang="en-US" sz="2800" b="1" dirty="0">
+                <a:solidFill>
+                  <a:srgbClr val="1A2B3C"/>
+                </a:solidFill>
+                <a:latin typeface="Malgun Gothic" pitchFamily="34" charset="0"/>
+                <a:ea typeface="Malgun Gothic" pitchFamily="34" charset="-122"/>
+                <a:cs typeface="Malgun Gothic" pitchFamily="34" charset="-120"/>
+              </a:rPr>
+              <a:t>왜 지속적인 투자가 필요한가</a:t>
+            </a:r>
+            <a:endParaRPr lang="en-US" sz="2800" dirty="0"/>
+          </a:p>
+        </p:txBody>
+      </p:sp>
+      <p:sp>
+        <p:nvSpPr>
+          <p:cNvPr id="7" name="Text 5"/>
+          <p:cNvSpPr/>
+          <p:nvPr/>
+        </p:nvSpPr>
+        <p:spPr>
+          <a:xfrm>
+            <a:off x="457200" y="1051560"/>
+            <a:ext cx="11277295" cy="320040"/>
+          </a:xfrm>
+          <a:prstGeom prst="rect">
+            <a:avLst/>
+          </a:prstGeom>
+          <a:noFill/>
+          <a:ln/>
+        </p:spPr>
+        <p:txBody>
+          <a:bodyPr wrap="square" rtlCol="0" anchor="ctr"/>
+          <a:lstStyle/>
+          <a:p>
+            <a:pPr indent="0" marL="0">
+              <a:buNone/>
+            </a:pPr>
+            <a:r>
+              <a:rPr lang="en-US" sz="1300" dirty="0">
+                <a:solidFill>
+                  <a:srgbClr val="6B7785"/>
+                </a:solidFill>
+                <a:latin typeface="Malgun Gothic" pitchFamily="34" charset="0"/>
+                <a:ea typeface="Malgun Gothic" pitchFamily="34" charset="-122"/>
+                <a:cs typeface="Malgun Gothic" pitchFamily="34" charset="-120"/>
+              </a:rPr>
+              <a:t>AI 정확도의 핵심은 모델이 아니라 데이터 — 한 번 만들고 끝나는 사업이 아닙니다</a:t>
+            </a:r>
+            <a:endParaRPr lang="en-US" sz="1300" dirty="0"/>
+          </a:p>
+        </p:txBody>
+      </p:sp>
+      <p:sp>
+        <p:nvSpPr>
+          <p:cNvPr id="8" name="Shape 6"/>
+          <p:cNvSpPr/>
+          <p:nvPr/>
+        </p:nvSpPr>
+        <p:spPr>
+          <a:xfrm>
+            <a:off x="457200" y="1417320"/>
+            <a:ext cx="548640" cy="54864"/>
+          </a:xfrm>
+          <a:prstGeom prst="rect">
+            <a:avLst/>
+          </a:prstGeom>
+          <a:solidFill>
+            <a:srgbClr val="4FB3BF"/>
+          </a:solidFill>
+          <a:ln w="12700">
+            <a:solidFill>
+              <a:srgbClr val="4FB3BF"/>
+            </a:solidFill>
+            <a:prstDash val="solid"/>
+          </a:ln>
+        </p:spPr>
+      </p:sp>
+      <p:sp>
+        <p:nvSpPr>
+          <p:cNvPr id="9" name="Shape 7"/>
+          <p:cNvSpPr/>
+          <p:nvPr/>
+        </p:nvSpPr>
+        <p:spPr>
+          <a:xfrm>
+            <a:off x="457200" y="1828800"/>
+            <a:ext cx="5532120" cy="2331720"/>
+          </a:xfrm>
+          <a:prstGeom prst="roundRect">
+            <a:avLst>
+              <a:gd name="adj" fmla="val 5882"/>
+            </a:avLst>
+          </a:prstGeom>
+          <a:solidFill>
+            <a:srgbClr val="E8F1F4"/>
+          </a:solidFill>
+          <a:ln w="15240">
+            <a:solidFill>
+              <a:srgbClr val="0E5C8A"/>
+            </a:solidFill>
+            <a:prstDash val="solid"/>
+          </a:ln>
+        </p:spPr>
+      </p:sp>
+      <p:sp>
+        <p:nvSpPr>
+          <p:cNvPr id="10" name="Shape 8"/>
+          <p:cNvSpPr/>
+          <p:nvPr/>
+        </p:nvSpPr>
+        <p:spPr>
+          <a:xfrm>
+            <a:off x="457200" y="1828800"/>
+            <a:ext cx="5532120" cy="457200"/>
+          </a:xfrm>
+          <a:prstGeom prst="rect">
+            <a:avLst/>
+          </a:prstGeom>
+          <a:solidFill>
+            <a:srgbClr val="0E5C8A"/>
+          </a:solidFill>
+          <a:ln w="12700">
+            <a:solidFill>
+              <a:srgbClr val="0E5C8A"/>
+            </a:solidFill>
+            <a:prstDash val="solid"/>
+          </a:ln>
+        </p:spPr>
+      </p:sp>
+      <p:sp>
+        <p:nvSpPr>
+          <p:cNvPr id="11" name="Text 9"/>
+          <p:cNvSpPr/>
+          <p:nvPr/>
+        </p:nvSpPr>
+        <p:spPr>
+          <a:xfrm>
+            <a:off x="640080" y="1874520"/>
+            <a:ext cx="5166360" cy="365760"/>
+          </a:xfrm>
+          <a:prstGeom prst="rect">
+            <a:avLst/>
+          </a:prstGeom>
+          <a:noFill/>
+          <a:ln/>
+        </p:spPr>
+        <p:txBody>
+          <a:bodyPr wrap="square" rtlCol="0" anchor="ctr"/>
+          <a:lstStyle/>
+          <a:p>
+            <a:pPr indent="0" marL="0">
+              <a:buNone/>
+            </a:pPr>
+            <a:r>
+              <a:rPr lang="en-US" sz="1100" b="1" spc="100" kern="0" dirty="0">
+                <a:solidFill>
+                  <a:srgbClr val="FFFFFF"/>
+                </a:solidFill>
+                <a:latin typeface="Malgun Gothic" pitchFamily="34" charset="0"/>
+                <a:ea typeface="Malgun Gothic" pitchFamily="34" charset="-122"/>
+                <a:cs typeface="Malgun Gothic" pitchFamily="34" charset="-120"/>
+              </a:rPr>
+              <a:t>STEP 1 — 데이터셋 확보 (가장 큰 자본 집행)</a:t>
+            </a:r>
+            <a:endParaRPr lang="en-US" sz="1100" dirty="0"/>
+          </a:p>
+        </p:txBody>
+      </p:sp>
+      <p:sp>
+        <p:nvSpPr>
+          <p:cNvPr id="12" name="Shape 10"/>
+          <p:cNvSpPr/>
+          <p:nvPr/>
+        </p:nvSpPr>
+        <p:spPr>
+          <a:xfrm>
+            <a:off x="685800" y="2468880"/>
+            <a:ext cx="1569720" cy="1554480"/>
+          </a:xfrm>
+          <a:prstGeom prst="rect">
+            <a:avLst/>
+          </a:prstGeom>
+          <a:solidFill>
+            <a:srgbClr val="FFFFFF"/>
+          </a:solidFill>
+          <a:ln w="6350">
+            <a:solidFill>
+              <a:srgbClr val="CFDCE2"/>
+            </a:solidFill>
+            <a:prstDash val="solid"/>
+          </a:ln>
+        </p:spPr>
+      </p:sp>
+      <p:sp>
+        <p:nvSpPr>
+          <p:cNvPr id="13" name="Text 11"/>
+          <p:cNvSpPr/>
+          <p:nvPr/>
+        </p:nvSpPr>
+        <p:spPr>
+          <a:xfrm>
+            <a:off x="685800" y="2560320"/>
+            <a:ext cx="1569720" cy="502920"/>
+          </a:xfrm>
+          <a:prstGeom prst="rect">
+            <a:avLst/>
+          </a:prstGeom>
+          <a:noFill/>
+          <a:ln/>
+        </p:spPr>
+        <p:txBody>
+          <a:bodyPr wrap="square" rtlCol="0" anchor="ctr"/>
+          <a:lstStyle/>
+          <a:p>
+            <a:pPr algn="ctr" indent="0" marL="0">
+              <a:buNone/>
+            </a:pPr>
+            <a:r>
+              <a:rPr lang="en-US" sz="2200" b="1" dirty="0">
+                <a:solidFill>
+                  <a:srgbClr val="0E5C8A"/>
+                </a:solidFill>
+                <a:latin typeface="Malgun Gothic" pitchFamily="34" charset="0"/>
+                <a:ea typeface="Malgun Gothic" pitchFamily="34" charset="-122"/>
+                <a:cs typeface="Malgun Gothic" pitchFamily="34" charset="-120"/>
+              </a:rPr>
+              <a:t>30,000+</a:t>
+            </a:r>
+            <a:endParaRPr lang="en-US" sz="2200" dirty="0"/>
+          </a:p>
+        </p:txBody>
+      </p:sp>
+      <p:sp>
+        <p:nvSpPr>
+          <p:cNvPr id="14" name="Text 12"/>
+          <p:cNvSpPr/>
+          <p:nvPr/>
+        </p:nvSpPr>
+        <p:spPr>
+          <a:xfrm>
+            <a:off x="685800" y="3063240"/>
+            <a:ext cx="1569720" cy="274320"/>
+          </a:xfrm>
+          <a:prstGeom prst="rect">
+            <a:avLst/>
+          </a:prstGeom>
+          <a:noFill/>
+          <a:ln/>
+        </p:spPr>
+        <p:txBody>
+          <a:bodyPr wrap="square" rtlCol="0" anchor="ctr"/>
+          <a:lstStyle/>
+          <a:p>
+            <a:pPr algn="ctr" indent="0" marL="0">
+              <a:buNone/>
+            </a:pPr>
+            <a:r>
+              <a:rPr lang="en-US" sz="1050" b="1" dirty="0">
+                <a:solidFill>
+                  <a:srgbClr val="1A2B3C"/>
+                </a:solidFill>
+                <a:latin typeface="Malgun Gothic" pitchFamily="34" charset="0"/>
+                <a:ea typeface="Malgun Gothic" pitchFamily="34" charset="-122"/>
+                <a:cs typeface="Malgun Gothic" pitchFamily="34" charset="-120"/>
+              </a:rPr>
+              <a:t>라벨링 사진</a:t>
+            </a:r>
+            <a:endParaRPr lang="en-US" sz="1050" dirty="0"/>
+          </a:p>
+        </p:txBody>
+      </p:sp>
+      <p:sp>
+        <p:nvSpPr>
+          <p:cNvPr id="15" name="Text 13"/>
+          <p:cNvSpPr/>
+          <p:nvPr/>
+        </p:nvSpPr>
+        <p:spPr>
+          <a:xfrm>
+            <a:off x="731520" y="3337560"/>
+            <a:ext cx="1478280" cy="640080"/>
+          </a:xfrm>
+          <a:prstGeom prst="rect">
+            <a:avLst/>
+          </a:prstGeom>
+          <a:noFill/>
+          <a:ln/>
+        </p:spPr>
+        <p:txBody>
+          <a:bodyPr wrap="square" rtlCol="0" anchor="t"/>
+          <a:lstStyle/>
+          <a:p>
+            <a:pPr algn="ctr" indent="0" marL="0">
+              <a:buNone/>
+            </a:pPr>
+            <a:r>
+              <a:rPr lang="en-US" sz="900" dirty="0">
+                <a:solidFill>
+                  <a:srgbClr val="6B7785"/>
+                </a:solidFill>
+                <a:latin typeface="Malgun Gothic" pitchFamily="34" charset="0"/>
+                <a:ea typeface="Malgun Gothic" pitchFamily="34" charset="-122"/>
+                <a:cs typeface="Malgun Gothic" pitchFamily="34" charset="-120"/>
+              </a:rPr>
+              <a:t>조명·각도·배경·</a:t>
+            </a:r>
+            <a:endParaRPr lang="en-US" sz="900" dirty="0"/>
+          </a:p>
+          <a:p>
+            <a:pPr algn="ctr" indent="0" marL="0">
+              <a:buNone/>
+            </a:pPr>
+            <a:r>
+              <a:rPr lang="en-US" sz="900" dirty="0">
+                <a:solidFill>
+                  <a:srgbClr val="6B7785"/>
+                </a:solidFill>
+                <a:latin typeface="Malgun Gothic" pitchFamily="34" charset="0"/>
+                <a:ea typeface="Malgun Gothic" pitchFamily="34" charset="-122"/>
+                <a:cs typeface="Malgun Gothic" pitchFamily="34" charset="-120"/>
+              </a:rPr>
+              <a:t>포장재·부분 변색</a:t>
+            </a:r>
+            <a:endParaRPr lang="en-US" sz="900" dirty="0"/>
+          </a:p>
+        </p:txBody>
+      </p:sp>
+      <p:sp>
+        <p:nvSpPr>
+          <p:cNvPr id="16" name="Shape 14"/>
+          <p:cNvSpPr/>
+          <p:nvPr/>
+        </p:nvSpPr>
+        <p:spPr>
+          <a:xfrm>
+            <a:off x="2346960" y="2468880"/>
+            <a:ext cx="1569720" cy="1554480"/>
+          </a:xfrm>
+          <a:prstGeom prst="rect">
+            <a:avLst/>
+          </a:prstGeom>
+          <a:solidFill>
+            <a:srgbClr val="FFFFFF"/>
+          </a:solidFill>
+          <a:ln w="6350">
+            <a:solidFill>
+              <a:srgbClr val="CFDCE2"/>
+            </a:solidFill>
+            <a:prstDash val="solid"/>
+          </a:ln>
+        </p:spPr>
+      </p:sp>
+      <p:sp>
+        <p:nvSpPr>
+          <p:cNvPr id="17" name="Text 15"/>
+          <p:cNvSpPr/>
+          <p:nvPr/>
+        </p:nvSpPr>
+        <p:spPr>
+          <a:xfrm>
+            <a:off x="2346960" y="2560320"/>
+            <a:ext cx="1569720" cy="502920"/>
+          </a:xfrm>
+          <a:prstGeom prst="rect">
+            <a:avLst/>
+          </a:prstGeom>
+          <a:noFill/>
+          <a:ln/>
+        </p:spPr>
+        <p:txBody>
+          <a:bodyPr wrap="square" rtlCol="0" anchor="ctr"/>
+          <a:lstStyle/>
+          <a:p>
+            <a:pPr algn="ctr" indent="0" marL="0">
+              <a:buNone/>
+            </a:pPr>
+            <a:r>
+              <a:rPr lang="en-US" sz="2200" b="1" dirty="0">
+                <a:solidFill>
+                  <a:srgbClr val="0E5C8A"/>
+                </a:solidFill>
+                <a:latin typeface="Malgun Gothic" pitchFamily="34" charset="0"/>
+                <a:ea typeface="Malgun Gothic" pitchFamily="34" charset="-122"/>
+                <a:cs typeface="Malgun Gothic" pitchFamily="34" charset="-120"/>
+              </a:rPr>
+              <a:t>6 개월</a:t>
+            </a:r>
+            <a:endParaRPr lang="en-US" sz="2200" dirty="0"/>
+          </a:p>
+        </p:txBody>
+      </p:sp>
+      <p:sp>
+        <p:nvSpPr>
+          <p:cNvPr id="18" name="Text 16"/>
+          <p:cNvSpPr/>
+          <p:nvPr/>
+        </p:nvSpPr>
+        <p:spPr>
+          <a:xfrm>
+            <a:off x="2346960" y="3063240"/>
+            <a:ext cx="1569720" cy="274320"/>
+          </a:xfrm>
+          <a:prstGeom prst="rect">
+            <a:avLst/>
+          </a:prstGeom>
+          <a:noFill/>
+          <a:ln/>
+        </p:spPr>
+        <p:txBody>
+          <a:bodyPr wrap="square" rtlCol="0" anchor="ctr"/>
+          <a:lstStyle/>
+          <a:p>
+            <a:pPr algn="ctr" indent="0" marL="0">
+              <a:buNone/>
+            </a:pPr>
+            <a:r>
+              <a:rPr lang="en-US" sz="1050" b="1" dirty="0">
+                <a:solidFill>
+                  <a:srgbClr val="1A2B3C"/>
+                </a:solidFill>
+                <a:latin typeface="Malgun Gothic" pitchFamily="34" charset="0"/>
+                <a:ea typeface="Malgun Gothic" pitchFamily="34" charset="-122"/>
+                <a:cs typeface="Malgun Gothic" pitchFamily="34" charset="-120"/>
+              </a:rPr>
+              <a:t>수집·라벨링 기간</a:t>
+            </a:r>
+            <a:endParaRPr lang="en-US" sz="1050" dirty="0"/>
+          </a:p>
+        </p:txBody>
+      </p:sp>
+      <p:sp>
+        <p:nvSpPr>
+          <p:cNvPr id="19" name="Text 17"/>
+          <p:cNvSpPr/>
+          <p:nvPr/>
+        </p:nvSpPr>
+        <p:spPr>
+          <a:xfrm>
+            <a:off x="2392680" y="3337560"/>
+            <a:ext cx="1478280" cy="640080"/>
+          </a:xfrm>
+          <a:prstGeom prst="rect">
+            <a:avLst/>
+          </a:prstGeom>
+          <a:noFill/>
+          <a:ln/>
+        </p:spPr>
+        <p:txBody>
+          <a:bodyPr wrap="square" rtlCol="0" anchor="t"/>
+          <a:lstStyle/>
+          <a:p>
+            <a:pPr algn="ctr" indent="0" marL="0">
+              <a:buNone/>
+            </a:pPr>
+            <a:r>
+              <a:rPr lang="en-US" sz="900" dirty="0">
+                <a:solidFill>
+                  <a:srgbClr val="6B7785"/>
+                </a:solidFill>
+                <a:latin typeface="Malgun Gothic" pitchFamily="34" charset="0"/>
+                <a:ea typeface="Malgun Gothic" pitchFamily="34" charset="-122"/>
+                <a:cs typeface="Malgun Gothic" pitchFamily="34" charset="-120"/>
+              </a:rPr>
+              <a:t>전문 라벨러 +</a:t>
+            </a:r>
+            <a:endParaRPr lang="en-US" sz="900" dirty="0"/>
+          </a:p>
+          <a:p>
+            <a:pPr algn="ctr" indent="0" marL="0">
+              <a:buNone/>
+            </a:pPr>
+            <a:r>
+              <a:rPr lang="en-US" sz="900" dirty="0">
+                <a:solidFill>
+                  <a:srgbClr val="6B7785"/>
+                </a:solidFill>
+                <a:latin typeface="Malgun Gothic" pitchFamily="34" charset="0"/>
+                <a:ea typeface="Malgun Gothic" pitchFamily="34" charset="-122"/>
+                <a:cs typeface="Malgun Gothic" pitchFamily="34" charset="-120"/>
+              </a:rPr>
+              <a:t>식품공학 검수</a:t>
+            </a:r>
+            <a:endParaRPr lang="en-US" sz="900" dirty="0"/>
+          </a:p>
+        </p:txBody>
+      </p:sp>
+      <p:sp>
+        <p:nvSpPr>
+          <p:cNvPr id="20" name="Shape 18"/>
+          <p:cNvSpPr/>
+          <p:nvPr/>
+        </p:nvSpPr>
+        <p:spPr>
+          <a:xfrm>
+            <a:off x="4008120" y="2468880"/>
+            <a:ext cx="1569720" cy="1554480"/>
+          </a:xfrm>
+          <a:prstGeom prst="rect">
+            <a:avLst/>
+          </a:prstGeom>
+          <a:solidFill>
+            <a:srgbClr val="FFFFFF"/>
+          </a:solidFill>
+          <a:ln w="6350">
+            <a:solidFill>
+              <a:srgbClr val="CFDCE2"/>
+            </a:solidFill>
+            <a:prstDash val="solid"/>
+          </a:ln>
+        </p:spPr>
+      </p:sp>
+      <p:sp>
+        <p:nvSpPr>
+          <p:cNvPr id="21" name="Text 19"/>
+          <p:cNvSpPr/>
+          <p:nvPr/>
+        </p:nvSpPr>
+        <p:spPr>
+          <a:xfrm>
+            <a:off x="4008120" y="2560320"/>
+            <a:ext cx="1569720" cy="502920"/>
+          </a:xfrm>
+          <a:prstGeom prst="rect">
+            <a:avLst/>
+          </a:prstGeom>
+          <a:noFill/>
+          <a:ln/>
+        </p:spPr>
+        <p:txBody>
+          <a:bodyPr wrap="square" rtlCol="0" anchor="ctr"/>
+          <a:lstStyle/>
+          <a:p>
+            <a:pPr algn="ctr" indent="0" marL="0">
+              <a:buNone/>
+            </a:pPr>
+            <a:r>
+              <a:rPr lang="en-US" sz="2200" b="1" dirty="0">
+                <a:solidFill>
+                  <a:srgbClr val="0E5C8A"/>
+                </a:solidFill>
+                <a:latin typeface="Malgun Gothic" pitchFamily="34" charset="0"/>
+                <a:ea typeface="Malgun Gothic" pitchFamily="34" charset="-122"/>
+                <a:cs typeface="Malgun Gothic" pitchFamily="34" charset="-120"/>
+              </a:rPr>
+              <a:t>₩4 억+</a:t>
+            </a:r>
+            <a:endParaRPr lang="en-US" sz="2200" dirty="0"/>
+          </a:p>
+        </p:txBody>
+      </p:sp>
+      <p:sp>
+        <p:nvSpPr>
+          <p:cNvPr id="22" name="Text 20"/>
+          <p:cNvSpPr/>
+          <p:nvPr/>
+        </p:nvSpPr>
+        <p:spPr>
+          <a:xfrm>
+            <a:off x="4008120" y="3063240"/>
+            <a:ext cx="1569720" cy="274320"/>
+          </a:xfrm>
+          <a:prstGeom prst="rect">
+            <a:avLst/>
+          </a:prstGeom>
+          <a:noFill/>
+          <a:ln/>
+        </p:spPr>
+        <p:txBody>
+          <a:bodyPr wrap="square" rtlCol="0" anchor="ctr"/>
+          <a:lstStyle/>
+          <a:p>
+            <a:pPr algn="ctr" indent="0" marL="0">
+              <a:buNone/>
+            </a:pPr>
+            <a:r>
+              <a:rPr lang="en-US" sz="1050" b="1" dirty="0">
+                <a:solidFill>
+                  <a:srgbClr val="1A2B3C"/>
+                </a:solidFill>
+                <a:latin typeface="Malgun Gothic" pitchFamily="34" charset="0"/>
+                <a:ea typeface="Malgun Gothic" pitchFamily="34" charset="-122"/>
+                <a:cs typeface="Malgun Gothic" pitchFamily="34" charset="-120"/>
+              </a:rPr>
+              <a:t>추정 데이터 비용</a:t>
+            </a:r>
+            <a:endParaRPr lang="en-US" sz="1050" dirty="0"/>
+          </a:p>
+        </p:txBody>
+      </p:sp>
+      <p:sp>
+        <p:nvSpPr>
+          <p:cNvPr id="23" name="Text 21"/>
+          <p:cNvSpPr/>
+          <p:nvPr/>
+        </p:nvSpPr>
+        <p:spPr>
+          <a:xfrm>
+            <a:off x="4053840" y="3337560"/>
+            <a:ext cx="1478280" cy="640080"/>
+          </a:xfrm>
+          <a:prstGeom prst="rect">
+            <a:avLst/>
+          </a:prstGeom>
+          <a:noFill/>
+          <a:ln/>
+        </p:spPr>
+        <p:txBody>
+          <a:bodyPr wrap="square" rtlCol="0" anchor="t"/>
+          <a:lstStyle/>
+          <a:p>
+            <a:pPr algn="ctr" indent="0" marL="0">
+              <a:buNone/>
+            </a:pPr>
+            <a:r>
+              <a:rPr lang="en-US" sz="900" dirty="0">
+                <a:solidFill>
+                  <a:srgbClr val="6B7785"/>
+                </a:solidFill>
+                <a:latin typeface="Malgun Gothic" pitchFamily="34" charset="0"/>
+                <a:ea typeface="Malgun Gothic" pitchFamily="34" charset="-122"/>
+                <a:cs typeface="Malgun Gothic" pitchFamily="34" charset="-120"/>
+              </a:rPr>
+              <a:t>라벨링 외주 +</a:t>
+            </a:r>
+            <a:endParaRPr lang="en-US" sz="900" dirty="0"/>
+          </a:p>
+          <a:p>
+            <a:pPr algn="ctr" indent="0" marL="0">
+              <a:buNone/>
+            </a:pPr>
+            <a:r>
+              <a:rPr lang="en-US" sz="900" dirty="0">
+                <a:solidFill>
+                  <a:srgbClr val="6B7785"/>
+                </a:solidFill>
+                <a:latin typeface="Malgun Gothic" pitchFamily="34" charset="0"/>
+                <a:ea typeface="Malgun Gothic" pitchFamily="34" charset="-122"/>
+                <a:cs typeface="Malgun Gothic" pitchFamily="34" charset="-120"/>
+              </a:rPr>
+              <a:t>현장 촬영 + 검수</a:t>
+            </a:r>
+            <a:endParaRPr lang="en-US" sz="900" dirty="0"/>
+          </a:p>
+        </p:txBody>
+      </p:sp>
+      <p:sp>
+        <p:nvSpPr>
+          <p:cNvPr id="24" name="Shape 22"/>
+          <p:cNvSpPr/>
+          <p:nvPr/>
+        </p:nvSpPr>
+        <p:spPr>
+          <a:xfrm>
+            <a:off x="6202375" y="1828800"/>
+            <a:ext cx="5532120" cy="2331720"/>
+          </a:xfrm>
+          <a:prstGeom prst="roundRect">
+            <a:avLst>
+              <a:gd name="adj" fmla="val 5882"/>
+            </a:avLst>
+          </a:prstGeom>
+          <a:solidFill>
+            <a:srgbClr val="DCEFE5"/>
+          </a:solidFill>
+          <a:ln w="15240">
+            <a:solidFill>
+              <a:srgbClr val="2E7D5B"/>
+            </a:solidFill>
+            <a:prstDash val="solid"/>
+          </a:ln>
+        </p:spPr>
+      </p:sp>
+      <p:sp>
+        <p:nvSpPr>
+          <p:cNvPr id="25" name="Shape 23"/>
+          <p:cNvSpPr/>
+          <p:nvPr/>
+        </p:nvSpPr>
+        <p:spPr>
+          <a:xfrm>
+            <a:off x="6202375" y="1828800"/>
+            <a:ext cx="5532120" cy="457200"/>
+          </a:xfrm>
+          <a:prstGeom prst="rect">
+            <a:avLst/>
+          </a:prstGeom>
+          <a:solidFill>
+            <a:srgbClr val="2E7D5B"/>
+          </a:solidFill>
+          <a:ln w="12700">
+            <a:solidFill>
+              <a:srgbClr val="2E7D5B"/>
+            </a:solidFill>
+            <a:prstDash val="solid"/>
+          </a:ln>
+        </p:spPr>
+      </p:sp>
+      <p:sp>
+        <p:nvSpPr>
+          <p:cNvPr id="26" name="Text 24"/>
+          <p:cNvSpPr/>
+          <p:nvPr/>
+        </p:nvSpPr>
+        <p:spPr>
+          <a:xfrm>
+            <a:off x="6385255" y="1874520"/>
+            <a:ext cx="5166360" cy="365760"/>
+          </a:xfrm>
+          <a:prstGeom prst="rect">
+            <a:avLst/>
+          </a:prstGeom>
+          <a:noFill/>
+          <a:ln/>
+        </p:spPr>
+        <p:txBody>
+          <a:bodyPr wrap="square" rtlCol="0" anchor="ctr"/>
+          <a:lstStyle/>
+          <a:p>
+            <a:pPr indent="0" marL="0">
+              <a:buNone/>
+            </a:pPr>
+            <a:r>
+              <a:rPr lang="en-US" sz="1100" b="1" spc="100" kern="0" dirty="0">
+                <a:solidFill>
+                  <a:srgbClr val="FFFFFF"/>
+                </a:solidFill>
+                <a:latin typeface="Malgun Gothic" pitchFamily="34" charset="0"/>
+                <a:ea typeface="Malgun Gothic" pitchFamily="34" charset="-122"/>
+                <a:cs typeface="Malgun Gothic" pitchFamily="34" charset="-120"/>
+              </a:rPr>
+              <a:t>STEP 2 — Active Learning 사이클 (지속 운영비)</a:t>
+            </a:r>
+            <a:endParaRPr lang="en-US" sz="1100" dirty="0"/>
+          </a:p>
+        </p:txBody>
+      </p:sp>
+      <p:sp>
+        <p:nvSpPr>
+          <p:cNvPr id="27" name="Shape 25"/>
+          <p:cNvSpPr/>
+          <p:nvPr/>
+        </p:nvSpPr>
+        <p:spPr>
+          <a:xfrm>
+            <a:off x="8556955" y="2834640"/>
+            <a:ext cx="822960" cy="548640"/>
+          </a:xfrm>
+          <a:prstGeom prst="ellipse">
+            <a:avLst/>
+          </a:prstGeom>
+          <a:solidFill>
+            <a:srgbClr val="2E7D5B"/>
+          </a:solidFill>
+          <a:ln w="19050">
+            <a:solidFill>
+              <a:srgbClr val="FFFFFF"/>
+            </a:solidFill>
+            <a:prstDash val="solid"/>
+          </a:ln>
+        </p:spPr>
+      </p:sp>
+      <p:sp>
+        <p:nvSpPr>
+          <p:cNvPr id="28" name="Text 26"/>
+          <p:cNvSpPr/>
+          <p:nvPr/>
+        </p:nvSpPr>
+        <p:spPr>
+          <a:xfrm>
+            <a:off x="8511235" y="2852928"/>
+            <a:ext cx="914400" cy="502920"/>
+          </a:xfrm>
+          <a:prstGeom prst="rect">
+            <a:avLst/>
+          </a:prstGeom>
+          <a:noFill/>
+          <a:ln/>
+        </p:spPr>
+        <p:txBody>
+          <a:bodyPr wrap="square" rtlCol="0" anchor="ctr"/>
+          <a:lstStyle/>
+          <a:p>
+            <a:pPr algn="ctr" indent="0" marL="0">
+              <a:buNone/>
+            </a:pPr>
+            <a:r>
+              <a:rPr lang="en-US" sz="950" b="1" dirty="0">
+                <a:solidFill>
+                  <a:srgbClr val="FFFFFF"/>
+                </a:solidFill>
+                <a:latin typeface="Malgun Gothic" pitchFamily="34" charset="0"/>
+                <a:ea typeface="Malgun Gothic" pitchFamily="34" charset="-122"/>
+                <a:cs typeface="Malgun Gothic" pitchFamily="34" charset="-120"/>
+              </a:rPr>
+              <a:t>REPEAT</a:t>
+            </a:r>
+            <a:endParaRPr lang="en-US" sz="950" dirty="0"/>
+          </a:p>
+          <a:p>
+            <a:pPr algn="ctr" indent="0" marL="0">
+              <a:buNone/>
+            </a:pPr>
+            <a:r>
+              <a:rPr lang="en-US" sz="950" b="1" dirty="0">
+                <a:solidFill>
+                  <a:srgbClr val="FFFFFF"/>
+                </a:solidFill>
+                <a:latin typeface="Malgun Gothic" pitchFamily="34" charset="0"/>
+                <a:ea typeface="Malgun Gothic" pitchFamily="34" charset="-122"/>
+                <a:cs typeface="Malgun Gothic" pitchFamily="34" charset="-120"/>
+              </a:rPr>
+              <a:t>매 분기</a:t>
+            </a:r>
+            <a:endParaRPr lang="en-US" sz="950" dirty="0"/>
+          </a:p>
+        </p:txBody>
+      </p:sp>
+      <p:sp>
+        <p:nvSpPr>
+          <p:cNvPr id="29" name="Shape 27"/>
+          <p:cNvSpPr/>
+          <p:nvPr/>
+        </p:nvSpPr>
+        <p:spPr>
+          <a:xfrm>
+            <a:off x="8584387" y="2057400"/>
+            <a:ext cx="768096" cy="502920"/>
+          </a:xfrm>
+          <a:prstGeom prst="ellipse">
+            <a:avLst/>
+          </a:prstGeom>
+          <a:solidFill>
+            <a:srgbClr val="4FB3BF"/>
+          </a:solidFill>
+          <a:ln w="19050">
+            <a:solidFill>
+              <a:srgbClr val="FFFFFF"/>
+            </a:solidFill>
+            <a:prstDash val="solid"/>
+          </a:ln>
+        </p:spPr>
+      </p:sp>
+      <p:sp>
+        <p:nvSpPr>
+          <p:cNvPr id="30" name="Text 28"/>
+          <p:cNvSpPr/>
+          <p:nvPr/>
+        </p:nvSpPr>
+        <p:spPr>
+          <a:xfrm>
+            <a:off x="8465515" y="2039112"/>
+            <a:ext cx="1005840" cy="502920"/>
+          </a:xfrm>
+          <a:prstGeom prst="rect">
+            <a:avLst/>
+          </a:prstGeom>
+          <a:noFill/>
+          <a:ln/>
+        </p:spPr>
+        <p:txBody>
+          <a:bodyPr wrap="square" rtlCol="0" anchor="ctr"/>
+          <a:lstStyle/>
+          <a:p>
+            <a:pPr algn="ctr" indent="0" marL="0">
+              <a:buNone/>
+            </a:pPr>
+            <a:r>
+              <a:rPr lang="en-US" sz="850" b="1" dirty="0">
+                <a:solidFill>
+                  <a:srgbClr val="FFFFFF"/>
+                </a:solidFill>
+                <a:latin typeface="Malgun Gothic" pitchFamily="34" charset="0"/>
+                <a:ea typeface="Malgun Gothic" pitchFamily="34" charset="-122"/>
+                <a:cs typeface="Malgun Gothic" pitchFamily="34" charset="-120"/>
+              </a:rPr>
+              <a:t>사용자 촬영</a:t>
+            </a:r>
+            <a:endParaRPr lang="en-US" sz="850" dirty="0"/>
+          </a:p>
+          <a:p>
+            <a:pPr algn="ctr" indent="0" marL="0">
+              <a:buNone/>
+            </a:pPr>
+            <a:r>
+              <a:rPr lang="en-US" sz="850" b="1" dirty="0">
+                <a:solidFill>
+                  <a:srgbClr val="FFFFFF"/>
+                </a:solidFill>
+                <a:latin typeface="Malgun Gothic" pitchFamily="34" charset="0"/>
+                <a:ea typeface="Malgun Gothic" pitchFamily="34" charset="-122"/>
+                <a:cs typeface="Malgun Gothic" pitchFamily="34" charset="-120"/>
+              </a:rPr>
+              <a:t>수집</a:t>
+            </a:r>
+            <a:endParaRPr lang="en-US" sz="850" dirty="0"/>
+          </a:p>
+        </p:txBody>
+      </p:sp>
+      <p:sp>
+        <p:nvSpPr>
+          <p:cNvPr id="31" name="Shape 29"/>
+          <p:cNvSpPr/>
+          <p:nvPr/>
+        </p:nvSpPr>
+        <p:spPr>
+          <a:xfrm>
+            <a:off x="9361627" y="2834640"/>
+            <a:ext cx="768096" cy="502920"/>
+          </a:xfrm>
+          <a:prstGeom prst="ellipse">
+            <a:avLst/>
+          </a:prstGeom>
+          <a:solidFill>
+            <a:srgbClr val="C77E1E"/>
+          </a:solidFill>
+          <a:ln w="19050">
+            <a:solidFill>
+              <a:srgbClr val="FFFFFF"/>
+            </a:solidFill>
+            <a:prstDash val="solid"/>
+          </a:ln>
+        </p:spPr>
+      </p:sp>
+      <p:sp>
+        <p:nvSpPr>
+          <p:cNvPr id="32" name="Text 30"/>
+          <p:cNvSpPr/>
+          <p:nvPr/>
+        </p:nvSpPr>
+        <p:spPr>
+          <a:xfrm>
+            <a:off x="9242755" y="2816352"/>
+            <a:ext cx="1005840" cy="502920"/>
+          </a:xfrm>
+          <a:prstGeom prst="rect">
+            <a:avLst/>
+          </a:prstGeom>
+          <a:noFill/>
+          <a:ln/>
+        </p:spPr>
+        <p:txBody>
+          <a:bodyPr wrap="square" rtlCol="0" anchor="ctr"/>
+          <a:lstStyle/>
+          <a:p>
+            <a:pPr algn="ctr" indent="0" marL="0">
+              <a:buNone/>
+            </a:pPr>
+            <a:r>
+              <a:rPr lang="en-US" sz="850" b="1" dirty="0">
+                <a:solidFill>
+                  <a:srgbClr val="FFFFFF"/>
+                </a:solidFill>
+                <a:latin typeface="Malgun Gothic" pitchFamily="34" charset="0"/>
+                <a:ea typeface="Malgun Gothic" pitchFamily="34" charset="-122"/>
+                <a:cs typeface="Malgun Gothic" pitchFamily="34" charset="-120"/>
+              </a:rPr>
+              <a:t>낮은 신뢰도</a:t>
+            </a:r>
+            <a:endParaRPr lang="en-US" sz="850" dirty="0"/>
+          </a:p>
+          <a:p>
+            <a:pPr algn="ctr" indent="0" marL="0">
+              <a:buNone/>
+            </a:pPr>
+            <a:r>
+              <a:rPr lang="en-US" sz="850" b="1" dirty="0">
+                <a:solidFill>
+                  <a:srgbClr val="FFFFFF"/>
+                </a:solidFill>
+                <a:latin typeface="Malgun Gothic" pitchFamily="34" charset="0"/>
+                <a:ea typeface="Malgun Gothic" pitchFamily="34" charset="-122"/>
+                <a:cs typeface="Malgun Gothic" pitchFamily="34" charset="-120"/>
+              </a:rPr>
+              <a:t>샘플 추출</a:t>
+            </a:r>
+            <a:endParaRPr lang="en-US" sz="850" dirty="0"/>
+          </a:p>
+        </p:txBody>
+      </p:sp>
+      <p:sp>
+        <p:nvSpPr>
+          <p:cNvPr id="33" name="Shape 31"/>
+          <p:cNvSpPr/>
+          <p:nvPr/>
+        </p:nvSpPr>
+        <p:spPr>
+          <a:xfrm>
+            <a:off x="8584387" y="3611880"/>
+            <a:ext cx="768096" cy="502920"/>
+          </a:xfrm>
+          <a:prstGeom prst="ellipse">
+            <a:avLst/>
+          </a:prstGeom>
+          <a:solidFill>
+            <a:srgbClr val="0E5C8A"/>
+          </a:solidFill>
+          <a:ln w="19050">
+            <a:solidFill>
+              <a:srgbClr val="FFFFFF"/>
+            </a:solidFill>
+            <a:prstDash val="solid"/>
+          </a:ln>
+        </p:spPr>
+      </p:sp>
+      <p:sp>
+        <p:nvSpPr>
+          <p:cNvPr id="34" name="Text 32"/>
+          <p:cNvSpPr/>
+          <p:nvPr/>
+        </p:nvSpPr>
+        <p:spPr>
+          <a:xfrm>
+            <a:off x="8465515" y="3593592"/>
+            <a:ext cx="1005840" cy="502920"/>
+          </a:xfrm>
+          <a:prstGeom prst="rect">
+            <a:avLst/>
+          </a:prstGeom>
+          <a:noFill/>
+          <a:ln/>
+        </p:spPr>
+        <p:txBody>
+          <a:bodyPr wrap="square" rtlCol="0" anchor="ctr"/>
+          <a:lstStyle/>
+          <a:p>
+            <a:pPr algn="ctr" indent="0" marL="0">
+              <a:buNone/>
+            </a:pPr>
+            <a:r>
+              <a:rPr lang="en-US" sz="850" b="1" dirty="0">
+                <a:solidFill>
+                  <a:srgbClr val="FFFFFF"/>
+                </a:solidFill>
+                <a:latin typeface="Malgun Gothic" pitchFamily="34" charset="0"/>
+                <a:ea typeface="Malgun Gothic" pitchFamily="34" charset="-122"/>
+                <a:cs typeface="Malgun Gothic" pitchFamily="34" charset="-120"/>
+              </a:rPr>
+              <a:t>재라벨링 +</a:t>
+            </a:r>
+            <a:endParaRPr lang="en-US" sz="850" dirty="0"/>
+          </a:p>
+          <a:p>
+            <a:pPr algn="ctr" indent="0" marL="0">
+              <a:buNone/>
+            </a:pPr>
+            <a:r>
+              <a:rPr lang="en-US" sz="850" b="1" dirty="0">
+                <a:solidFill>
+                  <a:srgbClr val="FFFFFF"/>
+                </a:solidFill>
+                <a:latin typeface="Malgun Gothic" pitchFamily="34" charset="0"/>
+                <a:ea typeface="Malgun Gothic" pitchFamily="34" charset="-122"/>
+                <a:cs typeface="Malgun Gothic" pitchFamily="34" charset="-120"/>
+              </a:rPr>
+              <a:t>재학습</a:t>
+            </a:r>
+            <a:endParaRPr lang="en-US" sz="850" dirty="0"/>
+          </a:p>
+        </p:txBody>
+      </p:sp>
+      <p:sp>
+        <p:nvSpPr>
+          <p:cNvPr id="35" name="Shape 33"/>
+          <p:cNvSpPr/>
+          <p:nvPr/>
+        </p:nvSpPr>
+        <p:spPr>
+          <a:xfrm>
+            <a:off x="7807147" y="2834640"/>
+            <a:ext cx="768096" cy="502920"/>
+          </a:xfrm>
+          <a:prstGeom prst="ellipse">
+            <a:avLst/>
+          </a:prstGeom>
+          <a:solidFill>
+            <a:srgbClr val="2E7D5B"/>
+          </a:solidFill>
+          <a:ln w="19050">
+            <a:solidFill>
+              <a:srgbClr val="FFFFFF"/>
+            </a:solidFill>
+            <a:prstDash val="solid"/>
+          </a:ln>
+        </p:spPr>
+      </p:sp>
+      <p:sp>
+        <p:nvSpPr>
+          <p:cNvPr id="36" name="Text 34"/>
+          <p:cNvSpPr/>
+          <p:nvPr/>
+        </p:nvSpPr>
+        <p:spPr>
+          <a:xfrm>
+            <a:off x="7688275" y="2816352"/>
+            <a:ext cx="1005840" cy="502920"/>
+          </a:xfrm>
+          <a:prstGeom prst="rect">
+            <a:avLst/>
+          </a:prstGeom>
+          <a:noFill/>
+          <a:ln/>
+        </p:spPr>
+        <p:txBody>
+          <a:bodyPr wrap="square" rtlCol="0" anchor="ctr"/>
+          <a:lstStyle/>
+          <a:p>
+            <a:pPr algn="ctr" indent="0" marL="0">
+              <a:buNone/>
+            </a:pPr>
+            <a:r>
+              <a:rPr lang="en-US" sz="850" b="1" dirty="0">
+                <a:solidFill>
+                  <a:srgbClr val="FFFFFF"/>
+                </a:solidFill>
+                <a:latin typeface="Malgun Gothic" pitchFamily="34" charset="0"/>
+                <a:ea typeface="Malgun Gothic" pitchFamily="34" charset="-122"/>
+                <a:cs typeface="Malgun Gothic" pitchFamily="34" charset="-120"/>
+              </a:rPr>
+              <a:t>신모델</a:t>
+            </a:r>
+            <a:endParaRPr lang="en-US" sz="850" dirty="0"/>
+          </a:p>
+          <a:p>
+            <a:pPr algn="ctr" indent="0" marL="0">
+              <a:buNone/>
+            </a:pPr>
+            <a:r>
+              <a:rPr lang="en-US" sz="850" b="1" dirty="0">
+                <a:solidFill>
+                  <a:srgbClr val="FFFFFF"/>
+                </a:solidFill>
+                <a:latin typeface="Malgun Gothic" pitchFamily="34" charset="0"/>
+                <a:ea typeface="Malgun Gothic" pitchFamily="34" charset="-122"/>
+                <a:cs typeface="Malgun Gothic" pitchFamily="34" charset="-120"/>
+              </a:rPr>
+              <a:t>OTA 배포</a:t>
+            </a:r>
+            <a:endParaRPr lang="en-US" sz="850" dirty="0"/>
+          </a:p>
+        </p:txBody>
+      </p:sp>
+      <p:sp>
+        <p:nvSpPr>
+          <p:cNvPr id="37" name="Text 35"/>
+          <p:cNvSpPr/>
+          <p:nvPr/>
+        </p:nvSpPr>
+        <p:spPr>
+          <a:xfrm>
+            <a:off x="6385255" y="3794760"/>
+            <a:ext cx="5166360" cy="274320"/>
+          </a:xfrm>
+          <a:prstGeom prst="rect">
+            <a:avLst/>
+          </a:prstGeom>
+          <a:noFill/>
+          <a:ln/>
+        </p:spPr>
+        <p:txBody>
+          <a:bodyPr wrap="square" rtlCol="0" anchor="ctr"/>
+          <a:lstStyle/>
+          <a:p>
+            <a:pPr algn="ctr" indent="0" marL="0">
+              <a:buNone/>
+            </a:pPr>
+            <a:r>
+              <a:rPr lang="en-US" sz="1000" b="1" dirty="0">
+                <a:solidFill>
+                  <a:srgbClr val="2E7D5B"/>
+                </a:solidFill>
+                <a:latin typeface="Malgun Gothic" pitchFamily="34" charset="0"/>
+                <a:ea typeface="Malgun Gothic" pitchFamily="34" charset="-122"/>
+                <a:cs typeface="Malgun Gothic" pitchFamily="34" charset="-120"/>
+              </a:rPr>
+              <a:t>운영 비용 — 분기당 ₩6,000만+ (재라벨링 + 컴퓨팅 + 모델 배포)</a:t>
+            </a:r>
+            <a:endParaRPr lang="en-US" sz="1000" dirty="0"/>
+          </a:p>
+        </p:txBody>
+      </p:sp>
+      <p:sp>
+        <p:nvSpPr>
+          <p:cNvPr id="38" name="Shape 36"/>
+          <p:cNvSpPr/>
+          <p:nvPr/>
+        </p:nvSpPr>
+        <p:spPr>
+          <a:xfrm>
+            <a:off x="457200" y="4434840"/>
+            <a:ext cx="11277295" cy="1828800"/>
+          </a:xfrm>
+          <a:prstGeom prst="roundRect">
+            <a:avLst>
+              <a:gd name="adj" fmla="val 7500"/>
+            </a:avLst>
+          </a:prstGeom>
+          <a:solidFill>
+            <a:srgbClr val="F7E8D0"/>
+          </a:solidFill>
+          <a:ln w="15240">
+            <a:solidFill>
+              <a:srgbClr val="C77E1E"/>
+            </a:solidFill>
+            <a:prstDash val="solid"/>
+          </a:ln>
+        </p:spPr>
+      </p:sp>
+      <p:sp>
+        <p:nvSpPr>
+          <p:cNvPr id="39" name="Shape 37"/>
+          <p:cNvSpPr/>
+          <p:nvPr/>
+        </p:nvSpPr>
+        <p:spPr>
+          <a:xfrm>
+            <a:off x="457200" y="4434840"/>
+            <a:ext cx="11277295" cy="457200"/>
+          </a:xfrm>
+          <a:prstGeom prst="rect">
+            <a:avLst/>
+          </a:prstGeom>
+          <a:solidFill>
+            <a:srgbClr val="C77E1E"/>
+          </a:solidFill>
+          <a:ln w="12700">
+            <a:solidFill>
+              <a:srgbClr val="C77E1E"/>
+            </a:solidFill>
+            <a:prstDash val="solid"/>
+          </a:ln>
+        </p:spPr>
+      </p:sp>
+      <p:sp>
+        <p:nvSpPr>
+          <p:cNvPr id="40" name="Text 38"/>
+          <p:cNvSpPr/>
+          <p:nvPr/>
+        </p:nvSpPr>
+        <p:spPr>
+          <a:xfrm>
+            <a:off x="640080" y="4480560"/>
+            <a:ext cx="10911535" cy="365760"/>
+          </a:xfrm>
+          <a:prstGeom prst="rect">
+            <a:avLst/>
+          </a:prstGeom>
+          <a:noFill/>
+          <a:ln/>
+        </p:spPr>
+        <p:txBody>
+          <a:bodyPr wrap="square" rtlCol="0" anchor="ctr"/>
+          <a:lstStyle/>
+          <a:p>
+            <a:pPr indent="0" marL="0">
+              <a:buNone/>
+            </a:pPr>
+            <a:r>
+              <a:rPr lang="en-US" sz="1100" b="1" spc="100" kern="0" dirty="0">
+                <a:solidFill>
+                  <a:srgbClr val="FFFFFF"/>
+                </a:solidFill>
+                <a:latin typeface="Malgun Gothic" pitchFamily="34" charset="0"/>
+                <a:ea typeface="Malgun Gothic" pitchFamily="34" charset="-122"/>
+                <a:cs typeface="Malgun Gothic" pitchFamily="34" charset="-120"/>
+              </a:rPr>
+              <a:t>STEP 3 — 정확도 100%는 물리적으로 불가능합니다 (현실적 기대치 공유)</a:t>
+            </a:r>
+            <a:endParaRPr lang="en-US" sz="1100" dirty="0"/>
+          </a:p>
+        </p:txBody>
+      </p:sp>
+      <p:sp>
+        <p:nvSpPr>
+          <p:cNvPr id="41" name="Text 39"/>
+          <p:cNvSpPr/>
+          <p:nvPr/>
+        </p:nvSpPr>
+        <p:spPr>
+          <a:xfrm>
+            <a:off x="640080" y="4983480"/>
+            <a:ext cx="5486400" cy="274320"/>
+          </a:xfrm>
+          <a:prstGeom prst="rect">
+            <a:avLst/>
+          </a:prstGeom>
+          <a:noFill/>
+          <a:ln/>
+        </p:spPr>
+        <p:txBody>
+          <a:bodyPr wrap="square" rtlCol="0" anchor="ctr"/>
+          <a:lstStyle/>
+          <a:p>
+            <a:pPr indent="0" marL="0">
+              <a:buNone/>
+            </a:pPr>
+            <a:r>
+              <a:rPr lang="en-US" sz="1100" b="1" dirty="0">
+                <a:solidFill>
+                  <a:srgbClr val="1A2B3C"/>
+                </a:solidFill>
+                <a:latin typeface="Malgun Gothic" pitchFamily="34" charset="0"/>
+                <a:ea typeface="Malgun Gothic" pitchFamily="34" charset="-122"/>
+                <a:cs typeface="Malgun Gothic" pitchFamily="34" charset="-120"/>
+              </a:rPr>
+              <a:t>절대 통제할 수 없는 5가지 변수</a:t>
+            </a:r>
+            <a:endParaRPr lang="en-US" sz="1100" dirty="0"/>
+          </a:p>
+        </p:txBody>
+      </p:sp>
+      <p:sp>
+        <p:nvSpPr>
+          <p:cNvPr id="42" name="Text 40"/>
+          <p:cNvSpPr/>
+          <p:nvPr/>
+        </p:nvSpPr>
+        <p:spPr>
+          <a:xfrm>
+            <a:off x="777240" y="5303520"/>
+            <a:ext cx="5303520" cy="182880"/>
+          </a:xfrm>
+          <a:prstGeom prst="rect">
+            <a:avLst/>
+          </a:prstGeom>
+          <a:noFill/>
+          <a:ln/>
+        </p:spPr>
+        <p:txBody>
+          <a:bodyPr wrap="square" rtlCol="0" anchor="ctr"/>
+          <a:lstStyle/>
+          <a:p>
+            <a:pPr indent="0" marL="0">
+              <a:buNone/>
+            </a:pPr>
+            <a:r>
+              <a:rPr lang="en-US" sz="1000" dirty="0">
+                <a:solidFill>
+                  <a:srgbClr val="1A2B3C"/>
+                </a:solidFill>
+                <a:latin typeface="Malgun Gothic" pitchFamily="34" charset="0"/>
+                <a:ea typeface="Malgun Gothic" pitchFamily="34" charset="-122"/>
+                <a:cs typeface="Malgun Gothic" pitchFamily="34" charset="-120"/>
+              </a:rPr>
+              <a:t>📷  카메라 센서 편차 (기종마다 색감 다름)</a:t>
+            </a:r>
+            <a:endParaRPr lang="en-US" sz="1000" dirty="0"/>
+          </a:p>
+        </p:txBody>
+      </p:sp>
+      <p:sp>
+        <p:nvSpPr>
+          <p:cNvPr id="43" name="Text 41"/>
+          <p:cNvSpPr/>
+          <p:nvPr/>
+        </p:nvSpPr>
+        <p:spPr>
+          <a:xfrm>
+            <a:off x="777240" y="5468112"/>
+            <a:ext cx="5303520" cy="182880"/>
+          </a:xfrm>
+          <a:prstGeom prst="rect">
+            <a:avLst/>
+          </a:prstGeom>
+          <a:noFill/>
+          <a:ln/>
+        </p:spPr>
+        <p:txBody>
+          <a:bodyPr wrap="square" rtlCol="0" anchor="ctr"/>
+          <a:lstStyle/>
+          <a:p>
+            <a:pPr indent="0" marL="0">
+              <a:buNone/>
+            </a:pPr>
+            <a:r>
+              <a:rPr lang="en-US" sz="1000" dirty="0">
+                <a:solidFill>
+                  <a:srgbClr val="1A2B3C"/>
+                </a:solidFill>
+                <a:latin typeface="Malgun Gothic" pitchFamily="34" charset="0"/>
+                <a:ea typeface="Malgun Gothic" pitchFamily="34" charset="-122"/>
+                <a:cs typeface="Malgun Gothic" pitchFamily="34" charset="-120"/>
+              </a:rPr>
+              <a:t>💡  조명 환경 (LED·형광등·자연광·그늘)</a:t>
+            </a:r>
+            <a:endParaRPr lang="en-US" sz="1000" dirty="0"/>
+          </a:p>
+        </p:txBody>
+      </p:sp>
+      <p:sp>
+        <p:nvSpPr>
+          <p:cNvPr id="44" name="Text 42"/>
+          <p:cNvSpPr/>
+          <p:nvPr/>
+        </p:nvSpPr>
+        <p:spPr>
+          <a:xfrm>
+            <a:off x="777240" y="5632704"/>
+            <a:ext cx="5303520" cy="182880"/>
+          </a:xfrm>
+          <a:prstGeom prst="rect">
+            <a:avLst/>
+          </a:prstGeom>
+          <a:noFill/>
+          <a:ln/>
+        </p:spPr>
+        <p:txBody>
+          <a:bodyPr wrap="square" rtlCol="0" anchor="ctr"/>
+          <a:lstStyle/>
+          <a:p>
+            <a:pPr indent="0" marL="0">
+              <a:buNone/>
+            </a:pPr>
+            <a:r>
+              <a:rPr lang="en-US" sz="1000" dirty="0">
+                <a:solidFill>
+                  <a:srgbClr val="1A2B3C"/>
+                </a:solidFill>
+                <a:latin typeface="Malgun Gothic" pitchFamily="34" charset="0"/>
+                <a:ea typeface="Malgun Gothic" pitchFamily="34" charset="-122"/>
+                <a:cs typeface="Malgun Gothic" pitchFamily="34" charset="-120"/>
+              </a:rPr>
+              <a:t>📦  포장재 반사·결로·비닐 광택</a:t>
+            </a:r>
+            <a:endParaRPr lang="en-US" sz="1000" dirty="0"/>
+          </a:p>
+        </p:txBody>
+      </p:sp>
+      <p:sp>
+        <p:nvSpPr>
+          <p:cNvPr id="45" name="Text 43"/>
+          <p:cNvSpPr/>
+          <p:nvPr/>
+        </p:nvSpPr>
+        <p:spPr>
+          <a:xfrm>
+            <a:off x="777240" y="5797296"/>
+            <a:ext cx="5303520" cy="182880"/>
+          </a:xfrm>
+          <a:prstGeom prst="rect">
+            <a:avLst/>
+          </a:prstGeom>
+          <a:noFill/>
+          <a:ln/>
+        </p:spPr>
+        <p:txBody>
+          <a:bodyPr wrap="square" rtlCol="0" anchor="ctr"/>
+          <a:lstStyle/>
+          <a:p>
+            <a:pPr indent="0" marL="0">
+              <a:buNone/>
+            </a:pPr>
+            <a:r>
+              <a:rPr lang="en-US" sz="1000" dirty="0">
+                <a:solidFill>
+                  <a:srgbClr val="1A2B3C"/>
+                </a:solidFill>
+                <a:latin typeface="Malgun Gothic" pitchFamily="34" charset="0"/>
+                <a:ea typeface="Malgun Gothic" pitchFamily="34" charset="-122"/>
+                <a:cs typeface="Malgun Gothic" pitchFamily="34" charset="-120"/>
+              </a:rPr>
+              <a:t>🧪  칩 자체의 제조 편차 · 온도 이력</a:t>
+            </a:r>
+            <a:endParaRPr lang="en-US" sz="1000" dirty="0"/>
+          </a:p>
+        </p:txBody>
+      </p:sp>
+      <p:sp>
+        <p:nvSpPr>
+          <p:cNvPr id="46" name="Text 44"/>
+          <p:cNvSpPr/>
+          <p:nvPr/>
+        </p:nvSpPr>
+        <p:spPr>
+          <a:xfrm>
+            <a:off x="777240" y="5961888"/>
+            <a:ext cx="5303520" cy="182880"/>
+          </a:xfrm>
+          <a:prstGeom prst="rect">
+            <a:avLst/>
+          </a:prstGeom>
+          <a:noFill/>
+          <a:ln/>
+        </p:spPr>
+        <p:txBody>
+          <a:bodyPr wrap="square" rtlCol="0" anchor="ctr"/>
+          <a:lstStyle/>
+          <a:p>
+            <a:pPr indent="0" marL="0">
+              <a:buNone/>
+            </a:pPr>
+            <a:r>
+              <a:rPr lang="en-US" sz="1000" dirty="0">
+                <a:solidFill>
+                  <a:srgbClr val="1A2B3C"/>
+                </a:solidFill>
+                <a:latin typeface="Malgun Gothic" pitchFamily="34" charset="0"/>
+                <a:ea typeface="Malgun Gothic" pitchFamily="34" charset="-122"/>
+                <a:cs typeface="Malgun Gothic" pitchFamily="34" charset="-120"/>
+              </a:rPr>
+              <a:t>👆  사용자 촬영 각도 · 손가락 가림</a:t>
+            </a:r>
+            <a:endParaRPr lang="en-US" sz="1000" dirty="0"/>
+          </a:p>
+        </p:txBody>
+      </p:sp>
+      <p:sp>
+        <p:nvSpPr>
+          <p:cNvPr id="47" name="Text 45"/>
+          <p:cNvSpPr/>
+          <p:nvPr/>
+        </p:nvSpPr>
+        <p:spPr>
+          <a:xfrm>
+            <a:off x="6400800" y="4983480"/>
+            <a:ext cx="5303520" cy="274320"/>
+          </a:xfrm>
+          <a:prstGeom prst="rect">
+            <a:avLst/>
+          </a:prstGeom>
+          <a:noFill/>
+          <a:ln/>
+        </p:spPr>
+        <p:txBody>
+          <a:bodyPr wrap="square" rtlCol="0" anchor="ctr"/>
+          <a:lstStyle/>
+          <a:p>
+            <a:pPr indent="0" marL="0">
+              <a:buNone/>
+            </a:pPr>
+            <a:r>
+              <a:rPr lang="en-US" sz="1100" b="1" dirty="0">
+                <a:solidFill>
+                  <a:srgbClr val="1A2B3C"/>
+                </a:solidFill>
+                <a:latin typeface="Malgun Gothic" pitchFamily="34" charset="0"/>
+                <a:ea typeface="Malgun Gothic" pitchFamily="34" charset="-122"/>
+                <a:cs typeface="Malgun Gothic" pitchFamily="34" charset="-120"/>
+              </a:rPr>
+              <a:t>실현 가능한 목표 정확도</a:t>
+            </a:r>
+            <a:endParaRPr lang="en-US" sz="1100" dirty="0"/>
+          </a:p>
+        </p:txBody>
+      </p:sp>
+      <p:sp>
+        <p:nvSpPr>
+          <p:cNvPr id="48" name="Shape 46"/>
+          <p:cNvSpPr/>
+          <p:nvPr/>
+        </p:nvSpPr>
+        <p:spPr>
+          <a:xfrm>
+            <a:off x="6400800" y="5303520"/>
+            <a:ext cx="2468880" cy="548640"/>
+          </a:xfrm>
+          <a:prstGeom prst="rect">
+            <a:avLst/>
+          </a:prstGeom>
+          <a:solidFill>
+            <a:srgbClr val="FFFFFF"/>
+          </a:solidFill>
+          <a:ln w="19050">
+            <a:solidFill>
+              <a:srgbClr val="C77E1E"/>
+            </a:solidFill>
+            <a:prstDash val="solid"/>
+          </a:ln>
+        </p:spPr>
+      </p:sp>
+      <p:sp>
+        <p:nvSpPr>
+          <p:cNvPr id="49" name="Text 47"/>
+          <p:cNvSpPr/>
+          <p:nvPr/>
+        </p:nvSpPr>
+        <p:spPr>
+          <a:xfrm>
+            <a:off x="6446520" y="5349240"/>
+            <a:ext cx="914400" cy="457200"/>
+          </a:xfrm>
+          <a:prstGeom prst="rect">
+            <a:avLst/>
+          </a:prstGeom>
+          <a:noFill/>
+          <a:ln/>
+        </p:spPr>
+        <p:txBody>
+          <a:bodyPr wrap="square" rtlCol="0" anchor="ctr"/>
+          <a:lstStyle/>
+          <a:p>
+            <a:pPr algn="ctr" indent="0" marL="0">
+              <a:buNone/>
+            </a:pPr>
+            <a:r>
+              <a:rPr lang="en-US" sz="1800" b="1" dirty="0">
+                <a:solidFill>
+                  <a:srgbClr val="C77E1E"/>
+                </a:solidFill>
+                <a:latin typeface="Malgun Gothic" pitchFamily="34" charset="0"/>
+                <a:ea typeface="Malgun Gothic" pitchFamily="34" charset="-122"/>
+                <a:cs typeface="Malgun Gothic" pitchFamily="34" charset="-120"/>
+              </a:rPr>
+              <a:t>≥ 95%</a:t>
+            </a:r>
+            <a:endParaRPr lang="en-US" sz="1800" dirty="0"/>
+          </a:p>
+        </p:txBody>
+      </p:sp>
+      <p:sp>
+        <p:nvSpPr>
+          <p:cNvPr id="50" name="Text 48"/>
+          <p:cNvSpPr/>
+          <p:nvPr/>
+        </p:nvSpPr>
+        <p:spPr>
+          <a:xfrm>
+            <a:off x="7315200" y="5349240"/>
+            <a:ext cx="1463040" cy="457200"/>
+          </a:xfrm>
+          <a:prstGeom prst="rect">
+            <a:avLst/>
+          </a:prstGeom>
+          <a:noFill/>
+          <a:ln/>
+        </p:spPr>
+        <p:txBody>
+          <a:bodyPr wrap="square" rtlCol="0" anchor="ctr"/>
+          <a:lstStyle/>
+          <a:p>
+            <a:pPr indent="0" marL="0">
+              <a:buNone/>
+            </a:pPr>
+            <a:r>
+              <a:rPr lang="en-US" sz="950" dirty="0">
+                <a:solidFill>
+                  <a:srgbClr val="1A2B3C"/>
+                </a:solidFill>
+                <a:latin typeface="Malgun Gothic" pitchFamily="34" charset="0"/>
+                <a:ea typeface="Malgun Gothic" pitchFamily="34" charset="-122"/>
+                <a:cs typeface="Malgun Gothic" pitchFamily="34" charset="-120"/>
+              </a:rPr>
+              <a:t>Beta 출시 시점</a:t>
+            </a:r>
+            <a:endParaRPr lang="en-US" sz="950" dirty="0"/>
+          </a:p>
+        </p:txBody>
+      </p:sp>
+      <p:sp>
+        <p:nvSpPr>
+          <p:cNvPr id="51" name="Shape 49"/>
+          <p:cNvSpPr/>
+          <p:nvPr/>
+        </p:nvSpPr>
+        <p:spPr>
+          <a:xfrm>
+            <a:off x="9052560" y="5303520"/>
+            <a:ext cx="2468880" cy="548640"/>
+          </a:xfrm>
+          <a:prstGeom prst="rect">
+            <a:avLst/>
+          </a:prstGeom>
+          <a:solidFill>
+            <a:srgbClr val="FFFFFF"/>
+          </a:solidFill>
+          <a:ln w="19050">
+            <a:solidFill>
+              <a:srgbClr val="2E7D5B"/>
+            </a:solidFill>
+            <a:prstDash val="solid"/>
+          </a:ln>
+        </p:spPr>
+      </p:sp>
+      <p:sp>
+        <p:nvSpPr>
+          <p:cNvPr id="52" name="Text 50"/>
+          <p:cNvSpPr/>
+          <p:nvPr/>
+        </p:nvSpPr>
+        <p:spPr>
+          <a:xfrm>
+            <a:off x="9098280" y="5349240"/>
+            <a:ext cx="914400" cy="457200"/>
+          </a:xfrm>
+          <a:prstGeom prst="rect">
+            <a:avLst/>
+          </a:prstGeom>
+          <a:noFill/>
+          <a:ln/>
+        </p:spPr>
+        <p:txBody>
+          <a:bodyPr wrap="square" rtlCol="0" anchor="ctr"/>
+          <a:lstStyle/>
+          <a:p>
+            <a:pPr algn="ctr" indent="0" marL="0">
+              <a:buNone/>
+            </a:pPr>
+            <a:r>
+              <a:rPr lang="en-US" sz="1800" b="1" dirty="0">
+                <a:solidFill>
+                  <a:srgbClr val="2E7D5B"/>
+                </a:solidFill>
+                <a:latin typeface="Malgun Gothic" pitchFamily="34" charset="0"/>
+                <a:ea typeface="Malgun Gothic" pitchFamily="34" charset="-122"/>
+                <a:cs typeface="Malgun Gothic" pitchFamily="34" charset="-120"/>
+              </a:rPr>
+              <a:t>≥ 98%</a:t>
+            </a:r>
+            <a:endParaRPr lang="en-US" sz="1800" dirty="0"/>
+          </a:p>
+        </p:txBody>
+      </p:sp>
+      <p:sp>
+        <p:nvSpPr>
+          <p:cNvPr id="53" name="Text 51"/>
+          <p:cNvSpPr/>
+          <p:nvPr/>
+        </p:nvSpPr>
+        <p:spPr>
+          <a:xfrm>
+            <a:off x="9966960" y="5349240"/>
+            <a:ext cx="1463040" cy="457200"/>
+          </a:xfrm>
+          <a:prstGeom prst="rect">
+            <a:avLst/>
+          </a:prstGeom>
+          <a:noFill/>
+          <a:ln/>
+        </p:spPr>
+        <p:txBody>
+          <a:bodyPr wrap="square" rtlCol="0" anchor="ctr"/>
+          <a:lstStyle/>
+          <a:p>
+            <a:pPr indent="0" marL="0">
+              <a:buNone/>
+            </a:pPr>
+            <a:r>
+              <a:rPr lang="en-US" sz="950" dirty="0">
+                <a:solidFill>
+                  <a:srgbClr val="1A2B3C"/>
+                </a:solidFill>
+                <a:latin typeface="Malgun Gothic" pitchFamily="34" charset="0"/>
+                <a:ea typeface="Malgun Gothic" pitchFamily="34" charset="-122"/>
+                <a:cs typeface="Malgun Gothic" pitchFamily="34" charset="-120"/>
+              </a:rPr>
+              <a:t>1년 운영 후 (Active Learning)</a:t>
+            </a:r>
+            <a:endParaRPr lang="en-US" sz="950" dirty="0"/>
+          </a:p>
+        </p:txBody>
+      </p:sp>
+      <p:sp>
+        <p:nvSpPr>
+          <p:cNvPr id="54" name="Text 52"/>
+          <p:cNvSpPr/>
+          <p:nvPr/>
+        </p:nvSpPr>
+        <p:spPr>
+          <a:xfrm>
+            <a:off x="6400800" y="5916168"/>
+            <a:ext cx="5303520" cy="292608"/>
+          </a:xfrm>
+          <a:prstGeom prst="rect">
+            <a:avLst/>
+          </a:prstGeom>
+          <a:noFill/>
+          <a:ln/>
+        </p:spPr>
+        <p:txBody>
+          <a:bodyPr wrap="square" rtlCol="0" anchor="ctr"/>
+          <a:lstStyle/>
+          <a:p>
+            <a:pPr indent="0" marL="0">
+              <a:buNone/>
+            </a:pPr>
+            <a:r>
+              <a:rPr lang="en-US" sz="900" i="1" dirty="0">
+                <a:solidFill>
+                  <a:srgbClr val="6B7785"/>
+                </a:solidFill>
+                <a:latin typeface="Malgun Gothic" pitchFamily="34" charset="0"/>
+                <a:ea typeface="Malgun Gothic" pitchFamily="34" charset="-122"/>
+                <a:cs typeface="Malgun Gothic" pitchFamily="34" charset="-120"/>
+              </a:rPr>
+              <a:t>100% 보장형 의료/안전 인증 도구가 아닌 "보조 판정 도구"로 포지셔닝 — 식약처 식품 보조표시 가이드라인 준용</a:t>
+            </a:r>
+            <a:endParaRPr lang="en-US" sz="900" dirty="0"/>
           </a:p>
         </p:txBody>
       </p:sp>

--- a/exports/lotusbio_tti_demo.pptx
+++ b/exports/lotusbio_tti_demo.pptx
@@ -10,9 +10,10 @@
     <p:sldId id="258" r:id="rId4"/>
     <p:sldId id="259" r:id="rId5"/>
     <p:sldId id="260" r:id="rId6"/>
+    <p:sldId id="261" r:id="rId7"/>
   </p:sldIdLst>
   <p:notesMasterIdLst>
-    <p:notesMasterId r:id="rId7"/>
+    <p:notesMasterId r:id="rId8"/>
   </p:notesMasterIdLst>
   <p:sldSz cx="12192000" cy="6858000"/>
   <p:notesSz cx="6858000" cy="12192000"/>
@@ -882,6 +883,94 @@
             <a:fld id="{F7021451-1387-4CA6-816F-3879F97B5CBC}" type="slidenum">
               <a:rPr lang="en-US"/>
               <a:t>5</a:t>
+            </a:fld>
+            <a:endParaRPr lang="en-US"/>
+          </a:p>
+        </p:txBody>
+      </p:sp>
+    </p:spTree>
+    <p:extLst>
+      <p:ext uri="{BB962C8B-B14F-4D97-AF65-F5344CB8AC3E}">
+        <p14:creationId xmlns:p14="http://schemas.microsoft.com/office/powerpoint/2010/main" val="1024086991"/>
+      </p:ext>
+    </p:extLst>
+  </p:cSld>
+  <p:clrMapOvr>
+    <a:masterClrMapping/>
+  </p:clrMapOvr>
+</p:notes>
+</file>
+
+<file path=ppt/notesSlides/notesSlide6.xml><?xml version="1.0" encoding="utf-8"?>
+<p:notes xmlns:a="http://schemas.openxmlformats.org/drawingml/2006/main" xmlns:r="http://schemas.openxmlformats.org/officeDocument/2006/relationships" xmlns:p="http://schemas.openxmlformats.org/presentationml/2006/main">
+  <p:cSld>
+    <p:spTree>
+      <p:nvGrpSpPr>
+        <p:cNvPr id="1" name=""/>
+        <p:cNvGrpSpPr/>
+        <p:nvPr/>
+      </p:nvGrpSpPr>
+      <p:grpSpPr>
+        <a:xfrm>
+          <a:off x="0" y="0"/>
+          <a:ext cx="0" cy="0"/>
+          <a:chOff x="0" y="0"/>
+          <a:chExt cx="0" cy="0"/>
+        </a:xfrm>
+      </p:grpSpPr>
+      <p:sp>
+        <p:nvSpPr>
+          <p:cNvPr id="2" name="Slide Image Placeholder 1"/>
+          <p:cNvSpPr>
+            <a:spLocks noGrp="1" noRot="1" noChangeAspect="1"/>
+          </p:cNvSpPr>
+          <p:nvPr>
+            <p:ph type="sldImg"/>
+          </p:nvPr>
+        </p:nvSpPr>
+        <p:spPr/>
+      </p:sp>
+      <p:sp>
+        <p:nvSpPr>
+          <p:cNvPr id="3" name="Notes Placeholder 2"/>
+          <p:cNvSpPr>
+            <a:spLocks noGrp="1"/>
+          </p:cNvSpPr>
+          <p:nvPr>
+            <p:ph type="body" idx="1"/>
+          </p:nvPr>
+        </p:nvSpPr>
+        <p:spPr/>
+        <p:txBody>
+          <a:bodyPr/>
+          <a:lstStyle/>
+          <a:p>
+            <a:r>
+              <a:rPr lang="en-US" dirty="0"/>
+              <a:t/>
+            </a:r>
+            <a:endParaRPr lang="en-US" dirty="0"/>
+          </a:p>
+        </p:txBody>
+      </p:sp>
+      <p:sp>
+        <p:nvSpPr>
+          <p:cNvPr id="4" name="Slide Number Placeholder 3"/>
+          <p:cNvSpPr>
+            <a:spLocks noGrp="1"/>
+          </p:cNvSpPr>
+          <p:nvPr>
+            <p:ph type="sldNum" sz="quarter" idx="10"/>
+          </p:nvPr>
+        </p:nvSpPr>
+        <p:spPr/>
+        <p:txBody>
+          <a:bodyPr/>
+          <a:lstStyle/>
+          <a:p>
+            <a:fld id="{F7021451-1387-4CA6-816F-3879F97B5CBC}" type="slidenum">
+              <a:rPr lang="en-US"/>
+              <a:t>6</a:t>
             </a:fld>
             <a:endParaRPr lang="en-US"/>
           </a:p>
@@ -2484,7 +2573,7 @@
                 <a:ea typeface="Malgun Gothic" pitchFamily="34" charset="-122"/>
                 <a:cs typeface="Malgun Gothic" pitchFamily="34" charset="-120"/>
               </a:rPr>
-              <a:t>1 / 5</a:t>
+              <a:t>1 / 6</a:t>
             </a:r>
             <a:endParaRPr lang="en-US" sz="900" dirty="0"/>
           </a:p>
@@ -2658,7 +2747,7 @@
                 <a:ea typeface="Malgun Gothic" pitchFamily="34" charset="-122"/>
                 <a:cs typeface="Malgun Gothic" pitchFamily="34" charset="-120"/>
               </a:rPr>
-              <a:t>2 / 5</a:t>
+              <a:t>2 / 6</a:t>
             </a:r>
             <a:endParaRPr lang="en-US" sz="900" dirty="0"/>
           </a:p>
@@ -4494,7 +4583,7 @@
                 <a:ea typeface="Malgun Gothic" pitchFamily="34" charset="-122"/>
                 <a:cs typeface="Malgun Gothic" pitchFamily="34" charset="-120"/>
               </a:rPr>
-              <a:t>3 / 5</a:t>
+              <a:t>3 / 6</a:t>
             </a:r>
             <a:endParaRPr lang="en-US" sz="900" dirty="0"/>
           </a:p>
@@ -6729,7 +6818,7 @@
                 <a:ea typeface="Malgun Gothic" pitchFamily="34" charset="-122"/>
                 <a:cs typeface="Malgun Gothic" pitchFamily="34" charset="-120"/>
               </a:rPr>
-              <a:t>4 / 5</a:t>
+              <a:t>4 / 6</a:t>
             </a:r>
             <a:endParaRPr lang="en-US" sz="900" dirty="0"/>
           </a:p>
@@ -9106,7 +9195,7 @@
                 <a:ea typeface="Malgun Gothic" pitchFamily="34" charset="-122"/>
                 <a:cs typeface="Malgun Gothic" pitchFamily="34" charset="-120"/>
               </a:rPr>
-              <a:t>5 / 5</a:t>
+              <a:t>5 / 6</a:t>
             </a:r>
             <a:endParaRPr lang="en-US" sz="900" dirty="0"/>
           </a:p>
@@ -10922,6 +11011,2207 @@
                 <a:cs typeface="Malgun Gothic" pitchFamily="34" charset="-120"/>
               </a:rPr>
               <a:t>100% 보장형 의료/안전 인증 도구가 아닌 "보조 판정 도구"로 포지셔닝 — 식약처 식품 보조표시 가이드라인 준용</a:t>
+            </a:r>
+            <a:endParaRPr lang="en-US" sz="900" dirty="0"/>
+          </a:p>
+        </p:txBody>
+      </p:sp>
+    </p:spTree>
+  </p:cSld>
+  <p:clrMapOvr>
+    <a:masterClrMapping/>
+  </p:clrMapOvr>
+</p:sld>
+</file>
+
+<file path=ppt/slides/slide6.xml><?xml version="1.0" encoding="utf-8"?>
+<p:sld xmlns:a="http://schemas.openxmlformats.org/drawingml/2006/main" xmlns:r="http://schemas.openxmlformats.org/officeDocument/2006/relationships" xmlns:p="http://schemas.openxmlformats.org/presentationml/2006/main">
+  <p:cSld name="Slide 6">
+    <p:bg>
+      <p:bgPr>
+        <a:solidFill>
+          <a:srgbClr val="FFFFFF"/>
+        </a:solidFill>
+      </p:bgPr>
+    </p:bg>
+    <p:spTree>
+      <p:nvGrpSpPr>
+        <p:cNvPr id="1" name=""/>
+        <p:cNvGrpSpPr/>
+        <p:nvPr/>
+      </p:nvGrpSpPr>
+      <p:grpSpPr>
+        <a:xfrm>
+          <a:off x="0" y="0"/>
+          <a:ext cx="0" cy="0"/>
+          <a:chOff x="0" y="0"/>
+          <a:chExt cx="0" cy="0"/>
+        </a:xfrm>
+      </p:grpSpPr>
+      <p:sp>
+        <p:nvSpPr>
+          <p:cNvPr id="2" name="Shape 0"/>
+          <p:cNvSpPr/>
+          <p:nvPr/>
+        </p:nvSpPr>
+        <p:spPr>
+          <a:xfrm>
+            <a:off x="0" y="0"/>
+            <a:ext cx="12191695" cy="45720"/>
+          </a:xfrm>
+          <a:prstGeom prst="rect">
+            <a:avLst/>
+          </a:prstGeom>
+          <a:solidFill>
+            <a:srgbClr val="0E5C8A"/>
+          </a:solidFill>
+          <a:ln w="12700">
+            <a:solidFill>
+              <a:srgbClr val="0E5C8A"/>
+            </a:solidFill>
+            <a:prstDash val="solid"/>
+          </a:ln>
+        </p:spPr>
+      </p:sp>
+      <p:sp>
+        <p:nvSpPr>
+          <p:cNvPr id="3" name="Text 1"/>
+          <p:cNvSpPr/>
+          <p:nvPr/>
+        </p:nvSpPr>
+        <p:spPr>
+          <a:xfrm>
+            <a:off x="365760" y="164592"/>
+            <a:ext cx="3657600" cy="274320"/>
+          </a:xfrm>
+          <a:prstGeom prst="rect">
+            <a:avLst/>
+          </a:prstGeom>
+          <a:noFill/>
+          <a:ln/>
+        </p:spPr>
+        <p:txBody>
+          <a:bodyPr wrap="square" rtlCol="0" anchor="ctr"/>
+          <a:lstStyle/>
+          <a:p>
+            <a:pPr indent="0" marL="0">
+              <a:buNone/>
+            </a:pPr>
+            <a:r>
+              <a:rPr lang="en-US" sz="1000" dirty="0">
+                <a:solidFill>
+                  <a:srgbClr val="6B7785"/>
+                </a:solidFill>
+                <a:latin typeface="Malgun Gothic" pitchFamily="34" charset="0"/>
+                <a:ea typeface="Malgun Gothic" pitchFamily="34" charset="-122"/>
+                <a:cs typeface="Malgun Gothic" pitchFamily="34" charset="-120"/>
+              </a:rPr>
+              <a:t>Lotusbio · TTI AI Scanner</a:t>
+            </a:r>
+            <a:endParaRPr lang="en-US" sz="1000" dirty="0"/>
+          </a:p>
+        </p:txBody>
+      </p:sp>
+      <p:sp>
+        <p:nvSpPr>
+          <p:cNvPr id="4" name="Text 2"/>
+          <p:cNvSpPr/>
+          <p:nvPr/>
+        </p:nvSpPr>
+        <p:spPr>
+          <a:xfrm>
+            <a:off x="8991295" y="164592"/>
+            <a:ext cx="2834640" cy="274320"/>
+          </a:xfrm>
+          <a:prstGeom prst="rect">
+            <a:avLst/>
+          </a:prstGeom>
+          <a:noFill/>
+          <a:ln/>
+        </p:spPr>
+        <p:txBody>
+          <a:bodyPr wrap="square" rtlCol="0" anchor="ctr"/>
+          <a:lstStyle/>
+          <a:p>
+            <a:pPr algn="r" indent="0" marL="0">
+              <a:buNone/>
+            </a:pPr>
+            <a:r>
+              <a:rPr lang="en-US" sz="1000" spc="200" kern="0" dirty="0">
+                <a:solidFill>
+                  <a:srgbClr val="6B7785"/>
+                </a:solidFill>
+                <a:latin typeface="Malgun Gothic" pitchFamily="34" charset="0"/>
+                <a:ea typeface="Malgun Gothic" pitchFamily="34" charset="-122"/>
+                <a:cs typeface="Malgun Gothic" pitchFamily="34" charset="-120"/>
+              </a:rPr>
+              <a:t>INVESTOR DECK · 2026</a:t>
+            </a:r>
+            <a:endParaRPr lang="en-US" sz="1000" dirty="0"/>
+          </a:p>
+        </p:txBody>
+      </p:sp>
+      <p:sp>
+        <p:nvSpPr>
+          <p:cNvPr id="5" name="Text 3"/>
+          <p:cNvSpPr/>
+          <p:nvPr/>
+        </p:nvSpPr>
+        <p:spPr>
+          <a:xfrm>
+            <a:off x="11277295" y="6492240"/>
+            <a:ext cx="548640" cy="274320"/>
+          </a:xfrm>
+          <a:prstGeom prst="rect">
+            <a:avLst/>
+          </a:prstGeom>
+          <a:noFill/>
+          <a:ln/>
+        </p:spPr>
+        <p:txBody>
+          <a:bodyPr wrap="square" rtlCol="0" anchor="ctr"/>
+          <a:lstStyle/>
+          <a:p>
+            <a:pPr algn="r" indent="0" marL="0">
+              <a:buNone/>
+            </a:pPr>
+            <a:r>
+              <a:rPr lang="en-US" sz="900" dirty="0">
+                <a:solidFill>
+                  <a:srgbClr val="6B7785"/>
+                </a:solidFill>
+                <a:latin typeface="Malgun Gothic" pitchFamily="34" charset="0"/>
+                <a:ea typeface="Malgun Gothic" pitchFamily="34" charset="-122"/>
+                <a:cs typeface="Malgun Gothic" pitchFamily="34" charset="-120"/>
+              </a:rPr>
+              <a:t>6 / 6</a:t>
+            </a:r>
+            <a:endParaRPr lang="en-US" sz="900" dirty="0"/>
+          </a:p>
+        </p:txBody>
+      </p:sp>
+      <p:sp>
+        <p:nvSpPr>
+          <p:cNvPr id="6" name="Text 4"/>
+          <p:cNvSpPr/>
+          <p:nvPr/>
+        </p:nvSpPr>
+        <p:spPr>
+          <a:xfrm>
+            <a:off x="457200" y="502920"/>
+            <a:ext cx="11277295" cy="548640"/>
+          </a:xfrm>
+          <a:prstGeom prst="rect">
+            <a:avLst/>
+          </a:prstGeom>
+          <a:noFill/>
+          <a:ln/>
+        </p:spPr>
+        <p:txBody>
+          <a:bodyPr wrap="square" rtlCol="0" anchor="ctr"/>
+          <a:lstStyle/>
+          <a:p>
+            <a:pPr indent="0" marL="0">
+              <a:buNone/>
+            </a:pPr>
+            <a:r>
+              <a:rPr lang="en-US" sz="2800" b="1" dirty="0">
+                <a:solidFill>
+                  <a:srgbClr val="1A2B3C"/>
+                </a:solidFill>
+                <a:latin typeface="Malgun Gothic" pitchFamily="34" charset="0"/>
+                <a:ea typeface="Malgun Gothic" pitchFamily="34" charset="-122"/>
+                <a:cs typeface="Malgun Gothic" pitchFamily="34" charset="-120"/>
+              </a:rPr>
+              <a:t>용어 · 약어 설명</a:t>
+            </a:r>
+            <a:endParaRPr lang="en-US" sz="2800" dirty="0"/>
+          </a:p>
+        </p:txBody>
+      </p:sp>
+      <p:sp>
+        <p:nvSpPr>
+          <p:cNvPr id="7" name="Text 5"/>
+          <p:cNvSpPr/>
+          <p:nvPr/>
+        </p:nvSpPr>
+        <p:spPr>
+          <a:xfrm>
+            <a:off x="457200" y="1051560"/>
+            <a:ext cx="11277295" cy="320040"/>
+          </a:xfrm>
+          <a:prstGeom prst="rect">
+            <a:avLst/>
+          </a:prstGeom>
+          <a:noFill/>
+          <a:ln/>
+        </p:spPr>
+        <p:txBody>
+          <a:bodyPr wrap="square" rtlCol="0" anchor="ctr"/>
+          <a:lstStyle/>
+          <a:p>
+            <a:pPr indent="0" marL="0">
+              <a:buNone/>
+            </a:pPr>
+            <a:r>
+              <a:rPr lang="en-US" sz="1300" dirty="0">
+                <a:solidFill>
+                  <a:srgbClr val="6B7785"/>
+                </a:solidFill>
+                <a:latin typeface="Malgun Gothic" pitchFamily="34" charset="0"/>
+                <a:ea typeface="Malgun Gothic" pitchFamily="34" charset="-122"/>
+                <a:cs typeface="Malgun Gothic" pitchFamily="34" charset="-120"/>
+              </a:rPr>
+              <a:t>본 자료에 사용된 주요 기술 용어 정리</a:t>
+            </a:r>
+            <a:endParaRPr lang="en-US" sz="1300" dirty="0"/>
+          </a:p>
+        </p:txBody>
+      </p:sp>
+      <p:sp>
+        <p:nvSpPr>
+          <p:cNvPr id="8" name="Shape 6"/>
+          <p:cNvSpPr/>
+          <p:nvPr/>
+        </p:nvSpPr>
+        <p:spPr>
+          <a:xfrm>
+            <a:off x="457200" y="1417320"/>
+            <a:ext cx="548640" cy="54864"/>
+          </a:xfrm>
+          <a:prstGeom prst="rect">
+            <a:avLst/>
+          </a:prstGeom>
+          <a:solidFill>
+            <a:srgbClr val="4FB3BF"/>
+          </a:solidFill>
+          <a:ln w="12700">
+            <a:solidFill>
+              <a:srgbClr val="4FB3BF"/>
+            </a:solidFill>
+            <a:prstDash val="solid"/>
+          </a:ln>
+        </p:spPr>
+      </p:sp>
+      <p:sp>
+        <p:nvSpPr>
+          <p:cNvPr id="9" name="Shape 7"/>
+          <p:cNvSpPr/>
+          <p:nvPr/>
+        </p:nvSpPr>
+        <p:spPr>
+          <a:xfrm>
+            <a:off x="457200" y="1691640"/>
+            <a:ext cx="5501488" cy="2217420"/>
+          </a:xfrm>
+          <a:prstGeom prst="roundRect">
+            <a:avLst>
+              <a:gd name="adj" fmla="val 4124"/>
+            </a:avLst>
+          </a:prstGeom>
+          <a:solidFill>
+            <a:srgbClr val="FFFFFF"/>
+          </a:solidFill>
+          <a:ln w="9525">
+            <a:solidFill>
+              <a:srgbClr val="CFDCE2"/>
+            </a:solidFill>
+            <a:prstDash val="solid"/>
+          </a:ln>
+        </p:spPr>
+      </p:sp>
+      <p:sp>
+        <p:nvSpPr>
+          <p:cNvPr id="10" name="Shape 8"/>
+          <p:cNvSpPr/>
+          <p:nvPr/>
+        </p:nvSpPr>
+        <p:spPr>
+          <a:xfrm>
+            <a:off x="457200" y="1691640"/>
+            <a:ext cx="109728" cy="2217420"/>
+          </a:xfrm>
+          <a:prstGeom prst="rect">
+            <a:avLst/>
+          </a:prstGeom>
+          <a:solidFill>
+            <a:srgbClr val="0E5C8A"/>
+          </a:solidFill>
+          <a:ln w="12700">
+            <a:solidFill>
+              <a:srgbClr val="0E5C8A"/>
+            </a:solidFill>
+            <a:prstDash val="solid"/>
+          </a:ln>
+        </p:spPr>
+      </p:sp>
+      <p:sp>
+        <p:nvSpPr>
+          <p:cNvPr id="11" name="Text 9"/>
+          <p:cNvSpPr/>
+          <p:nvPr/>
+        </p:nvSpPr>
+        <p:spPr>
+          <a:xfrm>
+            <a:off x="731520" y="1828800"/>
+            <a:ext cx="5135728" cy="292608"/>
+          </a:xfrm>
+          <a:prstGeom prst="rect">
+            <a:avLst/>
+          </a:prstGeom>
+          <a:noFill/>
+          <a:ln/>
+        </p:spPr>
+        <p:txBody>
+          <a:bodyPr wrap="square" rtlCol="0" anchor="ctr"/>
+          <a:lstStyle/>
+          <a:p>
+            <a:pPr indent="0" marL="0">
+              <a:buNone/>
+            </a:pPr>
+            <a:r>
+              <a:rPr lang="en-US" sz="1300" b="1" spc="100" kern="0" dirty="0">
+                <a:solidFill>
+                  <a:srgbClr val="0E5C8A"/>
+                </a:solidFill>
+                <a:latin typeface="Malgun Gothic" pitchFamily="34" charset="0"/>
+                <a:ea typeface="Malgun Gothic" pitchFamily="34" charset="-122"/>
+                <a:cs typeface="Malgun Gothic" pitchFamily="34" charset="-120"/>
+              </a:rPr>
+              <a:t>AI · Model</a:t>
+            </a:r>
+            <a:endParaRPr lang="en-US" sz="1300" dirty="0"/>
+          </a:p>
+        </p:txBody>
+      </p:sp>
+      <p:sp>
+        <p:nvSpPr>
+          <p:cNvPr id="12" name="Text 10"/>
+          <p:cNvSpPr/>
+          <p:nvPr/>
+        </p:nvSpPr>
+        <p:spPr>
+          <a:xfrm>
+            <a:off x="731520" y="2194560"/>
+            <a:ext cx="2377440" cy="297180"/>
+          </a:xfrm>
+          <a:prstGeom prst="rect">
+            <a:avLst/>
+          </a:prstGeom>
+          <a:noFill/>
+          <a:ln/>
+        </p:spPr>
+        <p:txBody>
+          <a:bodyPr wrap="square" rtlCol="0" anchor="t"/>
+          <a:lstStyle/>
+          <a:p>
+            <a:pPr indent="0" marL="0">
+              <a:buNone/>
+            </a:pPr>
+            <a:r>
+              <a:rPr lang="en-US" sz="1000" b="1" dirty="0">
+                <a:solidFill>
+                  <a:srgbClr val="1A2B3C"/>
+                </a:solidFill>
+                <a:latin typeface="Malgun Gothic" pitchFamily="34" charset="0"/>
+                <a:ea typeface="Malgun Gothic" pitchFamily="34" charset="-122"/>
+                <a:cs typeface="Malgun Gothic" pitchFamily="34" charset="-120"/>
+              </a:rPr>
+              <a:t>CNN</a:t>
+            </a:r>
+            <a:endParaRPr lang="en-US" sz="1000" dirty="0"/>
+          </a:p>
+        </p:txBody>
+      </p:sp>
+      <p:sp>
+        <p:nvSpPr>
+          <p:cNvPr id="13" name="Text 11"/>
+          <p:cNvSpPr/>
+          <p:nvPr/>
+        </p:nvSpPr>
+        <p:spPr>
+          <a:xfrm>
+            <a:off x="3154680" y="2194560"/>
+            <a:ext cx="2666848" cy="297180"/>
+          </a:xfrm>
+          <a:prstGeom prst="rect">
+            <a:avLst/>
+          </a:prstGeom>
+          <a:noFill/>
+          <a:ln/>
+        </p:spPr>
+        <p:txBody>
+          <a:bodyPr wrap="square" rtlCol="0" anchor="t"/>
+          <a:lstStyle/>
+          <a:p>
+            <a:pPr indent="0" marL="0">
+              <a:buNone/>
+            </a:pPr>
+            <a:r>
+              <a:rPr lang="en-US" sz="900" dirty="0">
+                <a:solidFill>
+                  <a:srgbClr val="6B7785"/>
+                </a:solidFill>
+                <a:latin typeface="Malgun Gothic" pitchFamily="34" charset="0"/>
+                <a:ea typeface="Malgun Gothic" pitchFamily="34" charset="-122"/>
+                <a:cs typeface="Malgun Gothic" pitchFamily="34" charset="-120"/>
+              </a:rPr>
+              <a:t>Convolutional Neural Network — 이미지 인식의 표준 신경망 구조</a:t>
+            </a:r>
+            <a:endParaRPr lang="en-US" sz="900" dirty="0"/>
+          </a:p>
+        </p:txBody>
+      </p:sp>
+      <p:sp>
+        <p:nvSpPr>
+          <p:cNvPr id="14" name="Text 12"/>
+          <p:cNvSpPr/>
+          <p:nvPr/>
+        </p:nvSpPr>
+        <p:spPr>
+          <a:xfrm>
+            <a:off x="731520" y="2510028"/>
+            <a:ext cx="2377440" cy="297180"/>
+          </a:xfrm>
+          <a:prstGeom prst="rect">
+            <a:avLst/>
+          </a:prstGeom>
+          <a:noFill/>
+          <a:ln/>
+        </p:spPr>
+        <p:txBody>
+          <a:bodyPr wrap="square" rtlCol="0" anchor="t"/>
+          <a:lstStyle/>
+          <a:p>
+            <a:pPr indent="0" marL="0">
+              <a:buNone/>
+            </a:pPr>
+            <a:r>
+              <a:rPr lang="en-US" sz="1000" b="1" dirty="0">
+                <a:solidFill>
+                  <a:srgbClr val="1A2B3C"/>
+                </a:solidFill>
+                <a:latin typeface="Malgun Gothic" pitchFamily="34" charset="0"/>
+                <a:ea typeface="Malgun Gothic" pitchFamily="34" charset="-122"/>
+                <a:cs typeface="Malgun Gothic" pitchFamily="34" charset="-120"/>
+              </a:rPr>
+              <a:t>YOLO</a:t>
+            </a:r>
+            <a:endParaRPr lang="en-US" sz="1000" dirty="0"/>
+          </a:p>
+        </p:txBody>
+      </p:sp>
+      <p:sp>
+        <p:nvSpPr>
+          <p:cNvPr id="15" name="Text 13"/>
+          <p:cNvSpPr/>
+          <p:nvPr/>
+        </p:nvSpPr>
+        <p:spPr>
+          <a:xfrm>
+            <a:off x="3154680" y="2510028"/>
+            <a:ext cx="2666848" cy="297180"/>
+          </a:xfrm>
+          <a:prstGeom prst="rect">
+            <a:avLst/>
+          </a:prstGeom>
+          <a:noFill/>
+          <a:ln/>
+        </p:spPr>
+        <p:txBody>
+          <a:bodyPr wrap="square" rtlCol="0" anchor="t"/>
+          <a:lstStyle/>
+          <a:p>
+            <a:pPr indent="0" marL="0">
+              <a:buNone/>
+            </a:pPr>
+            <a:r>
+              <a:rPr lang="en-US" sz="900" dirty="0">
+                <a:solidFill>
+                  <a:srgbClr val="6B7785"/>
+                </a:solidFill>
+                <a:latin typeface="Malgun Gothic" pitchFamily="34" charset="0"/>
+                <a:ea typeface="Malgun Gothic" pitchFamily="34" charset="-122"/>
+                <a:cs typeface="Malgun Gothic" pitchFamily="34" charset="-120"/>
+              </a:rPr>
+              <a:t>You Only Look Once — 실시간 객체 검출 모델 (위치·크기 한 번에 예측)</a:t>
+            </a:r>
+            <a:endParaRPr lang="en-US" sz="900" dirty="0"/>
+          </a:p>
+        </p:txBody>
+      </p:sp>
+      <p:sp>
+        <p:nvSpPr>
+          <p:cNvPr id="16" name="Text 14"/>
+          <p:cNvSpPr/>
+          <p:nvPr/>
+        </p:nvSpPr>
+        <p:spPr>
+          <a:xfrm>
+            <a:off x="731520" y="2825496"/>
+            <a:ext cx="2377440" cy="297180"/>
+          </a:xfrm>
+          <a:prstGeom prst="rect">
+            <a:avLst/>
+          </a:prstGeom>
+          <a:noFill/>
+          <a:ln/>
+        </p:spPr>
+        <p:txBody>
+          <a:bodyPr wrap="square" rtlCol="0" anchor="t"/>
+          <a:lstStyle/>
+          <a:p>
+            <a:pPr indent="0" marL="0">
+              <a:buNone/>
+            </a:pPr>
+            <a:r>
+              <a:rPr lang="en-US" sz="1000" b="1" dirty="0">
+                <a:solidFill>
+                  <a:srgbClr val="1A2B3C"/>
+                </a:solidFill>
+                <a:latin typeface="Malgun Gothic" pitchFamily="34" charset="0"/>
+                <a:ea typeface="Malgun Gothic" pitchFamily="34" charset="-122"/>
+                <a:cs typeface="Malgun Gothic" pitchFamily="34" charset="-120"/>
+              </a:rPr>
+              <a:t>ResNet / EfficientFormer / MobileViT</a:t>
+            </a:r>
+            <a:endParaRPr lang="en-US" sz="1000" dirty="0"/>
+          </a:p>
+        </p:txBody>
+      </p:sp>
+      <p:sp>
+        <p:nvSpPr>
+          <p:cNvPr id="17" name="Text 15"/>
+          <p:cNvSpPr/>
+          <p:nvPr/>
+        </p:nvSpPr>
+        <p:spPr>
+          <a:xfrm>
+            <a:off x="3154680" y="2825496"/>
+            <a:ext cx="2666848" cy="297180"/>
+          </a:xfrm>
+          <a:prstGeom prst="rect">
+            <a:avLst/>
+          </a:prstGeom>
+          <a:noFill/>
+          <a:ln/>
+        </p:spPr>
+        <p:txBody>
+          <a:bodyPr wrap="square" rtlCol="0" anchor="t"/>
+          <a:lstStyle/>
+          <a:p>
+            <a:pPr indent="0" marL="0">
+              <a:buNone/>
+            </a:pPr>
+            <a:r>
+              <a:rPr lang="en-US" sz="900" dirty="0">
+                <a:solidFill>
+                  <a:srgbClr val="6B7785"/>
+                </a:solidFill>
+                <a:latin typeface="Malgun Gothic" pitchFamily="34" charset="0"/>
+                <a:ea typeface="Malgun Gothic" pitchFamily="34" charset="-122"/>
+                <a:cs typeface="Malgun Gothic" pitchFamily="34" charset="-120"/>
+              </a:rPr>
+              <a:t>이미지 분류용 딥러닝 백본 모델 (점점 가볍고 정확해진 세대별 진화)</a:t>
+            </a:r>
+            <a:endParaRPr lang="en-US" sz="900" dirty="0"/>
+          </a:p>
+        </p:txBody>
+      </p:sp>
+      <p:sp>
+        <p:nvSpPr>
+          <p:cNvPr id="18" name="Text 16"/>
+          <p:cNvSpPr/>
+          <p:nvPr/>
+        </p:nvSpPr>
+        <p:spPr>
+          <a:xfrm>
+            <a:off x="731520" y="3140964"/>
+            <a:ext cx="2377440" cy="297180"/>
+          </a:xfrm>
+          <a:prstGeom prst="rect">
+            <a:avLst/>
+          </a:prstGeom>
+          <a:noFill/>
+          <a:ln/>
+        </p:spPr>
+        <p:txBody>
+          <a:bodyPr wrap="square" rtlCol="0" anchor="t"/>
+          <a:lstStyle/>
+          <a:p>
+            <a:pPr indent="0" marL="0">
+              <a:buNone/>
+            </a:pPr>
+            <a:r>
+              <a:rPr lang="en-US" sz="1000" b="1" dirty="0">
+                <a:solidFill>
+                  <a:srgbClr val="1A2B3C"/>
+                </a:solidFill>
+                <a:latin typeface="Malgun Gothic" pitchFamily="34" charset="0"/>
+                <a:ea typeface="Malgun Gothic" pitchFamily="34" charset="-122"/>
+                <a:cs typeface="Malgun Gothic" pitchFamily="34" charset="-120"/>
+              </a:rPr>
+              <a:t>MobileNet</a:t>
+            </a:r>
+            <a:endParaRPr lang="en-US" sz="1000" dirty="0"/>
+          </a:p>
+        </p:txBody>
+      </p:sp>
+      <p:sp>
+        <p:nvSpPr>
+          <p:cNvPr id="19" name="Text 17"/>
+          <p:cNvSpPr/>
+          <p:nvPr/>
+        </p:nvSpPr>
+        <p:spPr>
+          <a:xfrm>
+            <a:off x="3154680" y="3140964"/>
+            <a:ext cx="2666848" cy="297180"/>
+          </a:xfrm>
+          <a:prstGeom prst="rect">
+            <a:avLst/>
+          </a:prstGeom>
+          <a:noFill/>
+          <a:ln/>
+        </p:spPr>
+        <p:txBody>
+          <a:bodyPr wrap="square" rtlCol="0" anchor="t"/>
+          <a:lstStyle/>
+          <a:p>
+            <a:pPr indent="0" marL="0">
+              <a:buNone/>
+            </a:pPr>
+            <a:r>
+              <a:rPr lang="en-US" sz="900" dirty="0">
+                <a:solidFill>
+                  <a:srgbClr val="6B7785"/>
+                </a:solidFill>
+                <a:latin typeface="Malgun Gothic" pitchFamily="34" charset="0"/>
+                <a:ea typeface="Malgun Gothic" pitchFamily="34" charset="-122"/>
+                <a:cs typeface="Malgun Gothic" pitchFamily="34" charset="-120"/>
+              </a:rPr>
+              <a:t>Google이 만든 모바일용 경량 CNN, 16MB 수준</a:t>
+            </a:r>
+            <a:endParaRPr lang="en-US" sz="900" dirty="0"/>
+          </a:p>
+        </p:txBody>
+      </p:sp>
+      <p:sp>
+        <p:nvSpPr>
+          <p:cNvPr id="20" name="Text 18"/>
+          <p:cNvSpPr/>
+          <p:nvPr/>
+        </p:nvSpPr>
+        <p:spPr>
+          <a:xfrm>
+            <a:off x="731520" y="3456432"/>
+            <a:ext cx="2377440" cy="297180"/>
+          </a:xfrm>
+          <a:prstGeom prst="rect">
+            <a:avLst/>
+          </a:prstGeom>
+          <a:noFill/>
+          <a:ln/>
+        </p:spPr>
+        <p:txBody>
+          <a:bodyPr wrap="square" rtlCol="0" anchor="t"/>
+          <a:lstStyle/>
+          <a:p>
+            <a:pPr indent="0" marL="0">
+              <a:buNone/>
+            </a:pPr>
+            <a:r>
+              <a:rPr lang="en-US" sz="1000" b="1" dirty="0">
+                <a:solidFill>
+                  <a:srgbClr val="1A2B3C"/>
+                </a:solidFill>
+                <a:latin typeface="Malgun Gothic" pitchFamily="34" charset="0"/>
+                <a:ea typeface="Malgun Gothic" pitchFamily="34" charset="-122"/>
+                <a:cs typeface="Malgun Gothic" pitchFamily="34" charset="-120"/>
+              </a:rPr>
+              <a:t>LLM</a:t>
+            </a:r>
+            <a:endParaRPr lang="en-US" sz="1000" dirty="0"/>
+          </a:p>
+        </p:txBody>
+      </p:sp>
+      <p:sp>
+        <p:nvSpPr>
+          <p:cNvPr id="21" name="Text 19"/>
+          <p:cNvSpPr/>
+          <p:nvPr/>
+        </p:nvSpPr>
+        <p:spPr>
+          <a:xfrm>
+            <a:off x="3154680" y="3456432"/>
+            <a:ext cx="2666848" cy="297180"/>
+          </a:xfrm>
+          <a:prstGeom prst="rect">
+            <a:avLst/>
+          </a:prstGeom>
+          <a:noFill/>
+          <a:ln/>
+        </p:spPr>
+        <p:txBody>
+          <a:bodyPr wrap="square" rtlCol="0" anchor="t"/>
+          <a:lstStyle/>
+          <a:p>
+            <a:pPr indent="0" marL="0">
+              <a:buNone/>
+            </a:pPr>
+            <a:r>
+              <a:rPr lang="en-US" sz="900" dirty="0">
+                <a:solidFill>
+                  <a:srgbClr val="6B7785"/>
+                </a:solidFill>
+                <a:latin typeface="Malgun Gothic" pitchFamily="34" charset="0"/>
+                <a:ea typeface="Malgun Gothic" pitchFamily="34" charset="-122"/>
+                <a:cs typeface="Malgun Gothic" pitchFamily="34" charset="-120"/>
+              </a:rPr>
+              <a:t>Large Language Model — GPT-4V, Gemini 등 대형 멀티모달 모델</a:t>
+            </a:r>
+            <a:endParaRPr lang="en-US" sz="900" dirty="0"/>
+          </a:p>
+        </p:txBody>
+      </p:sp>
+      <p:sp>
+        <p:nvSpPr>
+          <p:cNvPr id="22" name="Shape 20"/>
+          <p:cNvSpPr/>
+          <p:nvPr/>
+        </p:nvSpPr>
+        <p:spPr>
+          <a:xfrm>
+            <a:off x="6233008" y="1691640"/>
+            <a:ext cx="5501488" cy="2217420"/>
+          </a:xfrm>
+          <a:prstGeom prst="roundRect">
+            <a:avLst>
+              <a:gd name="adj" fmla="val 4124"/>
+            </a:avLst>
+          </a:prstGeom>
+          <a:solidFill>
+            <a:srgbClr val="FFFFFF"/>
+          </a:solidFill>
+          <a:ln w="9525">
+            <a:solidFill>
+              <a:srgbClr val="CFDCE2"/>
+            </a:solidFill>
+            <a:prstDash val="solid"/>
+          </a:ln>
+        </p:spPr>
+      </p:sp>
+      <p:sp>
+        <p:nvSpPr>
+          <p:cNvPr id="23" name="Shape 21"/>
+          <p:cNvSpPr/>
+          <p:nvPr/>
+        </p:nvSpPr>
+        <p:spPr>
+          <a:xfrm>
+            <a:off x="6233008" y="1691640"/>
+            <a:ext cx="109728" cy="2217420"/>
+          </a:xfrm>
+          <a:prstGeom prst="rect">
+            <a:avLst/>
+          </a:prstGeom>
+          <a:solidFill>
+            <a:srgbClr val="4FB3BF"/>
+          </a:solidFill>
+          <a:ln w="12700">
+            <a:solidFill>
+              <a:srgbClr val="4FB3BF"/>
+            </a:solidFill>
+            <a:prstDash val="solid"/>
+          </a:ln>
+        </p:spPr>
+      </p:sp>
+      <p:sp>
+        <p:nvSpPr>
+          <p:cNvPr id="24" name="Text 22"/>
+          <p:cNvSpPr/>
+          <p:nvPr/>
+        </p:nvSpPr>
+        <p:spPr>
+          <a:xfrm>
+            <a:off x="6507328" y="1828800"/>
+            <a:ext cx="5135728" cy="292608"/>
+          </a:xfrm>
+          <a:prstGeom prst="rect">
+            <a:avLst/>
+          </a:prstGeom>
+          <a:noFill/>
+          <a:ln/>
+        </p:spPr>
+        <p:txBody>
+          <a:bodyPr wrap="square" rtlCol="0" anchor="ctr"/>
+          <a:lstStyle/>
+          <a:p>
+            <a:pPr indent="0" marL="0">
+              <a:buNone/>
+            </a:pPr>
+            <a:r>
+              <a:rPr lang="en-US" sz="1300" b="1" spc="100" kern="0" dirty="0">
+                <a:solidFill>
+                  <a:srgbClr val="4FB3BF"/>
+                </a:solidFill>
+                <a:latin typeface="Malgun Gothic" pitchFamily="34" charset="0"/>
+                <a:ea typeface="Malgun Gothic" pitchFamily="34" charset="-122"/>
+                <a:cs typeface="Malgun Gothic" pitchFamily="34" charset="-120"/>
+              </a:rPr>
+              <a:t>Training · Deployment</a:t>
+            </a:r>
+            <a:endParaRPr lang="en-US" sz="1300" dirty="0"/>
+          </a:p>
+        </p:txBody>
+      </p:sp>
+      <p:sp>
+        <p:nvSpPr>
+          <p:cNvPr id="25" name="Text 23"/>
+          <p:cNvSpPr/>
+          <p:nvPr/>
+        </p:nvSpPr>
+        <p:spPr>
+          <a:xfrm>
+            <a:off x="6507328" y="2194560"/>
+            <a:ext cx="2377440" cy="297180"/>
+          </a:xfrm>
+          <a:prstGeom prst="rect">
+            <a:avLst/>
+          </a:prstGeom>
+          <a:noFill/>
+          <a:ln/>
+        </p:spPr>
+        <p:txBody>
+          <a:bodyPr wrap="square" rtlCol="0" anchor="t"/>
+          <a:lstStyle/>
+          <a:p>
+            <a:pPr indent="0" marL="0">
+              <a:buNone/>
+            </a:pPr>
+            <a:r>
+              <a:rPr lang="en-US" sz="1000" b="1" dirty="0">
+                <a:solidFill>
+                  <a:srgbClr val="1A2B3C"/>
+                </a:solidFill>
+                <a:latin typeface="Malgun Gothic" pitchFamily="34" charset="0"/>
+                <a:ea typeface="Malgun Gothic" pitchFamily="34" charset="-122"/>
+                <a:cs typeface="Malgun Gothic" pitchFamily="34" charset="-120"/>
+              </a:rPr>
+              <a:t>ImageNet</a:t>
+            </a:r>
+            <a:endParaRPr lang="en-US" sz="1000" dirty="0"/>
+          </a:p>
+        </p:txBody>
+      </p:sp>
+      <p:sp>
+        <p:nvSpPr>
+          <p:cNvPr id="26" name="Text 24"/>
+          <p:cNvSpPr/>
+          <p:nvPr/>
+        </p:nvSpPr>
+        <p:spPr>
+          <a:xfrm>
+            <a:off x="8930488" y="2194560"/>
+            <a:ext cx="2666848" cy="297180"/>
+          </a:xfrm>
+          <a:prstGeom prst="rect">
+            <a:avLst/>
+          </a:prstGeom>
+          <a:noFill/>
+          <a:ln/>
+        </p:spPr>
+        <p:txBody>
+          <a:bodyPr wrap="square" rtlCol="0" anchor="t"/>
+          <a:lstStyle/>
+          <a:p>
+            <a:pPr indent="0" marL="0">
+              <a:buNone/>
+            </a:pPr>
+            <a:r>
+              <a:rPr lang="en-US" sz="900" dirty="0">
+                <a:solidFill>
+                  <a:srgbClr val="6B7785"/>
+                </a:solidFill>
+                <a:latin typeface="Malgun Gothic" pitchFamily="34" charset="0"/>
+                <a:ea typeface="Malgun Gothic" pitchFamily="34" charset="-122"/>
+                <a:cs typeface="Malgun Gothic" pitchFamily="34" charset="-120"/>
+              </a:rPr>
+              <a:t>1,400만 장 사진 데이터셋 — 대부분의 비전 모델 사전학습 표준</a:t>
+            </a:r>
+            <a:endParaRPr lang="en-US" sz="900" dirty="0"/>
+          </a:p>
+        </p:txBody>
+      </p:sp>
+      <p:sp>
+        <p:nvSpPr>
+          <p:cNvPr id="27" name="Text 25"/>
+          <p:cNvSpPr/>
+          <p:nvPr/>
+        </p:nvSpPr>
+        <p:spPr>
+          <a:xfrm>
+            <a:off x="6507328" y="2510028"/>
+            <a:ext cx="2377440" cy="297180"/>
+          </a:xfrm>
+          <a:prstGeom prst="rect">
+            <a:avLst/>
+          </a:prstGeom>
+          <a:noFill/>
+          <a:ln/>
+        </p:spPr>
+        <p:txBody>
+          <a:bodyPr wrap="square" rtlCol="0" anchor="t"/>
+          <a:lstStyle/>
+          <a:p>
+            <a:pPr indent="0" marL="0">
+              <a:buNone/>
+            </a:pPr>
+            <a:r>
+              <a:rPr lang="en-US" sz="1000" b="1" dirty="0">
+                <a:solidFill>
+                  <a:srgbClr val="1A2B3C"/>
+                </a:solidFill>
+                <a:latin typeface="Malgun Gothic" pitchFamily="34" charset="0"/>
+                <a:ea typeface="Malgun Gothic" pitchFamily="34" charset="-122"/>
+                <a:cs typeface="Malgun Gothic" pitchFamily="34" charset="-120"/>
+              </a:rPr>
+              <a:t>Fine-tuning</a:t>
+            </a:r>
+            <a:endParaRPr lang="en-US" sz="1000" dirty="0"/>
+          </a:p>
+        </p:txBody>
+      </p:sp>
+      <p:sp>
+        <p:nvSpPr>
+          <p:cNvPr id="28" name="Text 26"/>
+          <p:cNvSpPr/>
+          <p:nvPr/>
+        </p:nvSpPr>
+        <p:spPr>
+          <a:xfrm>
+            <a:off x="8930488" y="2510028"/>
+            <a:ext cx="2666848" cy="297180"/>
+          </a:xfrm>
+          <a:prstGeom prst="rect">
+            <a:avLst/>
+          </a:prstGeom>
+          <a:noFill/>
+          <a:ln/>
+        </p:spPr>
+        <p:txBody>
+          <a:bodyPr wrap="square" rtlCol="0" anchor="t"/>
+          <a:lstStyle/>
+          <a:p>
+            <a:pPr indent="0" marL="0">
+              <a:buNone/>
+            </a:pPr>
+            <a:r>
+              <a:rPr lang="en-US" sz="900" dirty="0">
+                <a:solidFill>
+                  <a:srgbClr val="6B7785"/>
+                </a:solidFill>
+                <a:latin typeface="Malgun Gothic" pitchFamily="34" charset="0"/>
+                <a:ea typeface="Malgun Gothic" pitchFamily="34" charset="-122"/>
+                <a:cs typeface="Malgun Gothic" pitchFamily="34" charset="-120"/>
+              </a:rPr>
+              <a:t>사전학습 모델을 자사 데이터로 추가 학습하여 도메인에 적응시키는 기법</a:t>
+            </a:r>
+            <a:endParaRPr lang="en-US" sz="900" dirty="0"/>
+          </a:p>
+        </p:txBody>
+      </p:sp>
+      <p:sp>
+        <p:nvSpPr>
+          <p:cNvPr id="29" name="Text 27"/>
+          <p:cNvSpPr/>
+          <p:nvPr/>
+        </p:nvSpPr>
+        <p:spPr>
+          <a:xfrm>
+            <a:off x="6507328" y="2825496"/>
+            <a:ext cx="2377440" cy="297180"/>
+          </a:xfrm>
+          <a:prstGeom prst="rect">
+            <a:avLst/>
+          </a:prstGeom>
+          <a:noFill/>
+          <a:ln/>
+        </p:spPr>
+        <p:txBody>
+          <a:bodyPr wrap="square" rtlCol="0" anchor="t"/>
+          <a:lstStyle/>
+          <a:p>
+            <a:pPr indent="0" marL="0">
+              <a:buNone/>
+            </a:pPr>
+            <a:r>
+              <a:rPr lang="en-US" sz="1000" b="1" dirty="0">
+                <a:solidFill>
+                  <a:srgbClr val="1A2B3C"/>
+                </a:solidFill>
+                <a:latin typeface="Malgun Gothic" pitchFamily="34" charset="0"/>
+                <a:ea typeface="Malgun Gothic" pitchFamily="34" charset="-122"/>
+                <a:cs typeface="Malgun Gothic" pitchFamily="34" charset="-120"/>
+              </a:rPr>
+              <a:t>Quantization (int8)</a:t>
+            </a:r>
+            <a:endParaRPr lang="en-US" sz="1000" dirty="0"/>
+          </a:p>
+        </p:txBody>
+      </p:sp>
+      <p:sp>
+        <p:nvSpPr>
+          <p:cNvPr id="30" name="Text 28"/>
+          <p:cNvSpPr/>
+          <p:nvPr/>
+        </p:nvSpPr>
+        <p:spPr>
+          <a:xfrm>
+            <a:off x="8930488" y="2825496"/>
+            <a:ext cx="2666848" cy="297180"/>
+          </a:xfrm>
+          <a:prstGeom prst="rect">
+            <a:avLst/>
+          </a:prstGeom>
+          <a:noFill/>
+          <a:ln/>
+        </p:spPr>
+        <p:txBody>
+          <a:bodyPr wrap="square" rtlCol="0" anchor="t"/>
+          <a:lstStyle/>
+          <a:p>
+            <a:pPr indent="0" marL="0">
+              <a:buNone/>
+            </a:pPr>
+            <a:r>
+              <a:rPr lang="en-US" sz="900" dirty="0">
+                <a:solidFill>
+                  <a:srgbClr val="6B7785"/>
+                </a:solidFill>
+                <a:latin typeface="Malgun Gothic" pitchFamily="34" charset="0"/>
+                <a:ea typeface="Malgun Gothic" pitchFamily="34" charset="-122"/>
+                <a:cs typeface="Malgun Gothic" pitchFamily="34" charset="-120"/>
+              </a:rPr>
+              <a:t>32-bit 모델을 8-bit로 압축 → 모델 크기 1/4, 속도 2~4배 향상</a:t>
+            </a:r>
+            <a:endParaRPr lang="en-US" sz="900" dirty="0"/>
+          </a:p>
+        </p:txBody>
+      </p:sp>
+      <p:sp>
+        <p:nvSpPr>
+          <p:cNvPr id="31" name="Text 29"/>
+          <p:cNvSpPr/>
+          <p:nvPr/>
+        </p:nvSpPr>
+        <p:spPr>
+          <a:xfrm>
+            <a:off x="6507328" y="3140964"/>
+            <a:ext cx="2377440" cy="297180"/>
+          </a:xfrm>
+          <a:prstGeom prst="rect">
+            <a:avLst/>
+          </a:prstGeom>
+          <a:noFill/>
+          <a:ln/>
+        </p:spPr>
+        <p:txBody>
+          <a:bodyPr wrap="square" rtlCol="0" anchor="t"/>
+          <a:lstStyle/>
+          <a:p>
+            <a:pPr indent="0" marL="0">
+              <a:buNone/>
+            </a:pPr>
+            <a:r>
+              <a:rPr lang="en-US" sz="1000" b="1" dirty="0">
+                <a:solidFill>
+                  <a:srgbClr val="1A2B3C"/>
+                </a:solidFill>
+                <a:latin typeface="Malgun Gothic" pitchFamily="34" charset="0"/>
+                <a:ea typeface="Malgun Gothic" pitchFamily="34" charset="-122"/>
+                <a:cs typeface="Malgun Gothic" pitchFamily="34" charset="-120"/>
+              </a:rPr>
+              <a:t>Active Learning</a:t>
+            </a:r>
+            <a:endParaRPr lang="en-US" sz="1000" dirty="0"/>
+          </a:p>
+        </p:txBody>
+      </p:sp>
+      <p:sp>
+        <p:nvSpPr>
+          <p:cNvPr id="32" name="Text 30"/>
+          <p:cNvSpPr/>
+          <p:nvPr/>
+        </p:nvSpPr>
+        <p:spPr>
+          <a:xfrm>
+            <a:off x="8930488" y="3140964"/>
+            <a:ext cx="2666848" cy="297180"/>
+          </a:xfrm>
+          <a:prstGeom prst="rect">
+            <a:avLst/>
+          </a:prstGeom>
+          <a:noFill/>
+          <a:ln/>
+        </p:spPr>
+        <p:txBody>
+          <a:bodyPr wrap="square" rtlCol="0" anchor="t"/>
+          <a:lstStyle/>
+          <a:p>
+            <a:pPr indent="0" marL="0">
+              <a:buNone/>
+            </a:pPr>
+            <a:r>
+              <a:rPr lang="en-US" sz="900" dirty="0">
+                <a:solidFill>
+                  <a:srgbClr val="6B7785"/>
+                </a:solidFill>
+                <a:latin typeface="Malgun Gothic" pitchFamily="34" charset="0"/>
+                <a:ea typeface="Malgun Gothic" pitchFamily="34" charset="-122"/>
+                <a:cs typeface="Malgun Gothic" pitchFamily="34" charset="-120"/>
+              </a:rPr>
+              <a:t>사용자 데이터에서 어려운 샘플만 골라 재학습하는 효율적 학습 사이클</a:t>
+            </a:r>
+            <a:endParaRPr lang="en-US" sz="900" dirty="0"/>
+          </a:p>
+        </p:txBody>
+      </p:sp>
+      <p:sp>
+        <p:nvSpPr>
+          <p:cNvPr id="33" name="Text 31"/>
+          <p:cNvSpPr/>
+          <p:nvPr/>
+        </p:nvSpPr>
+        <p:spPr>
+          <a:xfrm>
+            <a:off x="6507328" y="3456432"/>
+            <a:ext cx="2377440" cy="297180"/>
+          </a:xfrm>
+          <a:prstGeom prst="rect">
+            <a:avLst/>
+          </a:prstGeom>
+          <a:noFill/>
+          <a:ln/>
+        </p:spPr>
+        <p:txBody>
+          <a:bodyPr wrap="square" rtlCol="0" anchor="t"/>
+          <a:lstStyle/>
+          <a:p>
+            <a:pPr indent="0" marL="0">
+              <a:buNone/>
+            </a:pPr>
+            <a:r>
+              <a:rPr lang="en-US" sz="1000" b="1" dirty="0">
+                <a:solidFill>
+                  <a:srgbClr val="1A2B3C"/>
+                </a:solidFill>
+                <a:latin typeface="Malgun Gothic" pitchFamily="34" charset="0"/>
+                <a:ea typeface="Malgun Gothic" pitchFamily="34" charset="-122"/>
+                <a:cs typeface="Malgun Gothic" pitchFamily="34" charset="-120"/>
+              </a:rPr>
+              <a:t>OTA</a:t>
+            </a:r>
+            <a:endParaRPr lang="en-US" sz="1000" dirty="0"/>
+          </a:p>
+        </p:txBody>
+      </p:sp>
+      <p:sp>
+        <p:nvSpPr>
+          <p:cNvPr id="34" name="Text 32"/>
+          <p:cNvSpPr/>
+          <p:nvPr/>
+        </p:nvSpPr>
+        <p:spPr>
+          <a:xfrm>
+            <a:off x="8930488" y="3456432"/>
+            <a:ext cx="2666848" cy="297180"/>
+          </a:xfrm>
+          <a:prstGeom prst="rect">
+            <a:avLst/>
+          </a:prstGeom>
+          <a:noFill/>
+          <a:ln/>
+        </p:spPr>
+        <p:txBody>
+          <a:bodyPr wrap="square" rtlCol="0" anchor="t"/>
+          <a:lstStyle/>
+          <a:p>
+            <a:pPr indent="0" marL="0">
+              <a:buNone/>
+            </a:pPr>
+            <a:r>
+              <a:rPr lang="en-US" sz="900" dirty="0">
+                <a:solidFill>
+                  <a:srgbClr val="6B7785"/>
+                </a:solidFill>
+                <a:latin typeface="Malgun Gothic" pitchFamily="34" charset="0"/>
+                <a:ea typeface="Malgun Gothic" pitchFamily="34" charset="-122"/>
+                <a:cs typeface="Malgun Gothic" pitchFamily="34" charset="-120"/>
+              </a:rPr>
+              <a:t>Over-the-Air — 앱 업데이트 없이 모델 파일만 무선 배포</a:t>
+            </a:r>
+            <a:endParaRPr lang="en-US" sz="900" dirty="0"/>
+          </a:p>
+        </p:txBody>
+      </p:sp>
+      <p:sp>
+        <p:nvSpPr>
+          <p:cNvPr id="35" name="Shape 33"/>
+          <p:cNvSpPr/>
+          <p:nvPr/>
+        </p:nvSpPr>
+        <p:spPr>
+          <a:xfrm>
+            <a:off x="457200" y="4091940"/>
+            <a:ext cx="5501488" cy="2217420"/>
+          </a:xfrm>
+          <a:prstGeom prst="roundRect">
+            <a:avLst>
+              <a:gd name="adj" fmla="val 4124"/>
+            </a:avLst>
+          </a:prstGeom>
+          <a:solidFill>
+            <a:srgbClr val="FFFFFF"/>
+          </a:solidFill>
+          <a:ln w="9525">
+            <a:solidFill>
+              <a:srgbClr val="CFDCE2"/>
+            </a:solidFill>
+            <a:prstDash val="solid"/>
+          </a:ln>
+        </p:spPr>
+      </p:sp>
+      <p:sp>
+        <p:nvSpPr>
+          <p:cNvPr id="36" name="Shape 34"/>
+          <p:cNvSpPr/>
+          <p:nvPr/>
+        </p:nvSpPr>
+        <p:spPr>
+          <a:xfrm>
+            <a:off x="457200" y="4091940"/>
+            <a:ext cx="109728" cy="2217420"/>
+          </a:xfrm>
+          <a:prstGeom prst="rect">
+            <a:avLst/>
+          </a:prstGeom>
+          <a:solidFill>
+            <a:srgbClr val="2E7D5B"/>
+          </a:solidFill>
+          <a:ln w="12700">
+            <a:solidFill>
+              <a:srgbClr val="2E7D5B"/>
+            </a:solidFill>
+            <a:prstDash val="solid"/>
+          </a:ln>
+        </p:spPr>
+      </p:sp>
+      <p:sp>
+        <p:nvSpPr>
+          <p:cNvPr id="37" name="Text 35"/>
+          <p:cNvSpPr/>
+          <p:nvPr/>
+        </p:nvSpPr>
+        <p:spPr>
+          <a:xfrm>
+            <a:off x="731520" y="4229100"/>
+            <a:ext cx="5135728" cy="292608"/>
+          </a:xfrm>
+          <a:prstGeom prst="rect">
+            <a:avLst/>
+          </a:prstGeom>
+          <a:noFill/>
+          <a:ln/>
+        </p:spPr>
+        <p:txBody>
+          <a:bodyPr wrap="square" rtlCol="0" anchor="ctr"/>
+          <a:lstStyle/>
+          <a:p>
+            <a:pPr indent="0" marL="0">
+              <a:buNone/>
+            </a:pPr>
+            <a:r>
+              <a:rPr lang="en-US" sz="1300" b="1" spc="100" kern="0" dirty="0">
+                <a:solidFill>
+                  <a:srgbClr val="2E7D5B"/>
+                </a:solidFill>
+                <a:latin typeface="Malgun Gothic" pitchFamily="34" charset="0"/>
+                <a:ea typeface="Malgun Gothic" pitchFamily="34" charset="-122"/>
+                <a:cs typeface="Malgun Gothic" pitchFamily="34" charset="-120"/>
+              </a:rPr>
+              <a:t>Vision · Camera</a:t>
+            </a:r>
+            <a:endParaRPr lang="en-US" sz="1300" dirty="0"/>
+          </a:p>
+        </p:txBody>
+      </p:sp>
+      <p:sp>
+        <p:nvSpPr>
+          <p:cNvPr id="38" name="Text 36"/>
+          <p:cNvSpPr/>
+          <p:nvPr/>
+        </p:nvSpPr>
+        <p:spPr>
+          <a:xfrm>
+            <a:off x="731520" y="4594860"/>
+            <a:ext cx="2377440" cy="297180"/>
+          </a:xfrm>
+          <a:prstGeom prst="rect">
+            <a:avLst/>
+          </a:prstGeom>
+          <a:noFill/>
+          <a:ln/>
+        </p:spPr>
+        <p:txBody>
+          <a:bodyPr wrap="square" rtlCol="0" anchor="t"/>
+          <a:lstStyle/>
+          <a:p>
+            <a:pPr indent="0" marL="0">
+              <a:buNone/>
+            </a:pPr>
+            <a:r>
+              <a:rPr lang="en-US" sz="1000" b="1" dirty="0">
+                <a:solidFill>
+                  <a:srgbClr val="1A2B3C"/>
+                </a:solidFill>
+                <a:latin typeface="Malgun Gothic" pitchFamily="34" charset="0"/>
+                <a:ea typeface="Malgun Gothic" pitchFamily="34" charset="-122"/>
+                <a:cs typeface="Malgun Gothic" pitchFamily="34" charset="-120"/>
+              </a:rPr>
+              <a:t>TTI</a:t>
+            </a:r>
+            <a:endParaRPr lang="en-US" sz="1000" dirty="0"/>
+          </a:p>
+        </p:txBody>
+      </p:sp>
+      <p:sp>
+        <p:nvSpPr>
+          <p:cNvPr id="39" name="Text 37"/>
+          <p:cNvSpPr/>
+          <p:nvPr/>
+        </p:nvSpPr>
+        <p:spPr>
+          <a:xfrm>
+            <a:off x="3154680" y="4594860"/>
+            <a:ext cx="2666848" cy="297180"/>
+          </a:xfrm>
+          <a:prstGeom prst="rect">
+            <a:avLst/>
+          </a:prstGeom>
+          <a:noFill/>
+          <a:ln/>
+        </p:spPr>
+        <p:txBody>
+          <a:bodyPr wrap="square" rtlCol="0" anchor="t"/>
+          <a:lstStyle/>
+          <a:p>
+            <a:pPr indent="0" marL="0">
+              <a:buNone/>
+            </a:pPr>
+            <a:r>
+              <a:rPr lang="en-US" sz="900" dirty="0">
+                <a:solidFill>
+                  <a:srgbClr val="6B7785"/>
+                </a:solidFill>
+                <a:latin typeface="Malgun Gothic" pitchFamily="34" charset="0"/>
+                <a:ea typeface="Malgun Gothic" pitchFamily="34" charset="-122"/>
+                <a:cs typeface="Malgun Gothic" pitchFamily="34" charset="-120"/>
+              </a:rPr>
+              <a:t>Time-Temperature Indicator — 온도·시간에 따라 색이 변하는 식품 신선도 칩</a:t>
+            </a:r>
+            <a:endParaRPr lang="en-US" sz="900" dirty="0"/>
+          </a:p>
+        </p:txBody>
+      </p:sp>
+      <p:sp>
+        <p:nvSpPr>
+          <p:cNvPr id="40" name="Text 38"/>
+          <p:cNvSpPr/>
+          <p:nvPr/>
+        </p:nvSpPr>
+        <p:spPr>
+          <a:xfrm>
+            <a:off x="731520" y="4910328"/>
+            <a:ext cx="2377440" cy="297180"/>
+          </a:xfrm>
+          <a:prstGeom prst="rect">
+            <a:avLst/>
+          </a:prstGeom>
+          <a:noFill/>
+          <a:ln/>
+        </p:spPr>
+        <p:txBody>
+          <a:bodyPr wrap="square" rtlCol="0" anchor="t"/>
+          <a:lstStyle/>
+          <a:p>
+            <a:pPr indent="0" marL="0">
+              <a:buNone/>
+            </a:pPr>
+            <a:r>
+              <a:rPr lang="en-US" sz="1000" b="1" dirty="0">
+                <a:solidFill>
+                  <a:srgbClr val="1A2B3C"/>
+                </a:solidFill>
+                <a:latin typeface="Malgun Gothic" pitchFamily="34" charset="0"/>
+                <a:ea typeface="Malgun Gothic" pitchFamily="34" charset="-122"/>
+                <a:cs typeface="Malgun Gothic" pitchFamily="34" charset="-120"/>
+              </a:rPr>
+              <a:t>ROI</a:t>
+            </a:r>
+            <a:endParaRPr lang="en-US" sz="1000" dirty="0"/>
+          </a:p>
+        </p:txBody>
+      </p:sp>
+      <p:sp>
+        <p:nvSpPr>
+          <p:cNvPr id="41" name="Text 39"/>
+          <p:cNvSpPr/>
+          <p:nvPr/>
+        </p:nvSpPr>
+        <p:spPr>
+          <a:xfrm>
+            <a:off x="3154680" y="4910328"/>
+            <a:ext cx="2666848" cy="297180"/>
+          </a:xfrm>
+          <a:prstGeom prst="rect">
+            <a:avLst/>
+          </a:prstGeom>
+          <a:noFill/>
+          <a:ln/>
+        </p:spPr>
+        <p:txBody>
+          <a:bodyPr wrap="square" rtlCol="0" anchor="t"/>
+          <a:lstStyle/>
+          <a:p>
+            <a:pPr indent="0" marL="0">
+              <a:buNone/>
+            </a:pPr>
+            <a:r>
+              <a:rPr lang="en-US" sz="900" dirty="0">
+                <a:solidFill>
+                  <a:srgbClr val="6B7785"/>
+                </a:solidFill>
+                <a:latin typeface="Malgun Gothic" pitchFamily="34" charset="0"/>
+                <a:ea typeface="Malgun Gothic" pitchFamily="34" charset="-122"/>
+                <a:cs typeface="Malgun Gothic" pitchFamily="34" charset="-120"/>
+              </a:rPr>
+              <a:t>Region of Interest — 분석 대상 영역 (앱의 점선 원 안쪽)</a:t>
+            </a:r>
+            <a:endParaRPr lang="en-US" sz="900" dirty="0"/>
+          </a:p>
+        </p:txBody>
+      </p:sp>
+      <p:sp>
+        <p:nvSpPr>
+          <p:cNvPr id="42" name="Text 40"/>
+          <p:cNvSpPr/>
+          <p:nvPr/>
+        </p:nvSpPr>
+        <p:spPr>
+          <a:xfrm>
+            <a:off x="731520" y="5225796"/>
+            <a:ext cx="2377440" cy="297180"/>
+          </a:xfrm>
+          <a:prstGeom prst="rect">
+            <a:avLst/>
+          </a:prstGeom>
+          <a:noFill/>
+          <a:ln/>
+        </p:spPr>
+        <p:txBody>
+          <a:bodyPr wrap="square" rtlCol="0" anchor="t"/>
+          <a:lstStyle/>
+          <a:p>
+            <a:pPr indent="0" marL="0">
+              <a:buNone/>
+            </a:pPr>
+            <a:r>
+              <a:rPr lang="en-US" sz="1000" b="1" dirty="0">
+                <a:solidFill>
+                  <a:srgbClr val="1A2B3C"/>
+                </a:solidFill>
+                <a:latin typeface="Malgun Gothic" pitchFamily="34" charset="0"/>
+                <a:ea typeface="Malgun Gothic" pitchFamily="34" charset="-122"/>
+                <a:cs typeface="Malgun Gothic" pitchFamily="34" charset="-120"/>
+              </a:rPr>
+              <a:t>WB</a:t>
+            </a:r>
+            <a:endParaRPr lang="en-US" sz="1000" dirty="0"/>
+          </a:p>
+        </p:txBody>
+      </p:sp>
+      <p:sp>
+        <p:nvSpPr>
+          <p:cNvPr id="43" name="Text 41"/>
+          <p:cNvSpPr/>
+          <p:nvPr/>
+        </p:nvSpPr>
+        <p:spPr>
+          <a:xfrm>
+            <a:off x="3154680" y="5225796"/>
+            <a:ext cx="2666848" cy="297180"/>
+          </a:xfrm>
+          <a:prstGeom prst="rect">
+            <a:avLst/>
+          </a:prstGeom>
+          <a:noFill/>
+          <a:ln/>
+        </p:spPr>
+        <p:txBody>
+          <a:bodyPr wrap="square" rtlCol="0" anchor="t"/>
+          <a:lstStyle/>
+          <a:p>
+            <a:pPr indent="0" marL="0">
+              <a:buNone/>
+            </a:pPr>
+            <a:r>
+              <a:rPr lang="en-US" sz="900" dirty="0">
+                <a:solidFill>
+                  <a:srgbClr val="6B7785"/>
+                </a:solidFill>
+                <a:latin typeface="Malgun Gothic" pitchFamily="34" charset="0"/>
+                <a:ea typeface="Malgun Gothic" pitchFamily="34" charset="-122"/>
+                <a:cs typeface="Malgun Gothic" pitchFamily="34" charset="-120"/>
+              </a:rPr>
+              <a:t>White Balance — 광원에 따라 달라지는 색감을 보정</a:t>
+            </a:r>
+            <a:endParaRPr lang="en-US" sz="900" dirty="0"/>
+          </a:p>
+        </p:txBody>
+      </p:sp>
+      <p:sp>
+        <p:nvSpPr>
+          <p:cNvPr id="44" name="Text 42"/>
+          <p:cNvSpPr/>
+          <p:nvPr/>
+        </p:nvSpPr>
+        <p:spPr>
+          <a:xfrm>
+            <a:off x="731520" y="5541264"/>
+            <a:ext cx="2377440" cy="297180"/>
+          </a:xfrm>
+          <a:prstGeom prst="rect">
+            <a:avLst/>
+          </a:prstGeom>
+          <a:noFill/>
+          <a:ln/>
+        </p:spPr>
+        <p:txBody>
+          <a:bodyPr wrap="square" rtlCol="0" anchor="t"/>
+          <a:lstStyle/>
+          <a:p>
+            <a:pPr indent="0" marL="0">
+              <a:buNone/>
+            </a:pPr>
+            <a:r>
+              <a:rPr lang="en-US" sz="1000" b="1" dirty="0">
+                <a:solidFill>
+                  <a:srgbClr val="1A2B3C"/>
+                </a:solidFill>
+                <a:latin typeface="Malgun Gothic" pitchFamily="34" charset="0"/>
+                <a:ea typeface="Malgun Gothic" pitchFamily="34" charset="-122"/>
+                <a:cs typeface="Malgun Gothic" pitchFamily="34" charset="-120"/>
+              </a:rPr>
+              <a:t>Perspective Correction</a:t>
+            </a:r>
+            <a:endParaRPr lang="en-US" sz="1000" dirty="0"/>
+          </a:p>
+        </p:txBody>
+      </p:sp>
+      <p:sp>
+        <p:nvSpPr>
+          <p:cNvPr id="45" name="Text 43"/>
+          <p:cNvSpPr/>
+          <p:nvPr/>
+        </p:nvSpPr>
+        <p:spPr>
+          <a:xfrm>
+            <a:off x="3154680" y="5541264"/>
+            <a:ext cx="2666848" cy="297180"/>
+          </a:xfrm>
+          <a:prstGeom prst="rect">
+            <a:avLst/>
+          </a:prstGeom>
+          <a:noFill/>
+          <a:ln/>
+        </p:spPr>
+        <p:txBody>
+          <a:bodyPr wrap="square" rtlCol="0" anchor="t"/>
+          <a:lstStyle/>
+          <a:p>
+            <a:pPr indent="0" marL="0">
+              <a:buNone/>
+            </a:pPr>
+            <a:r>
+              <a:rPr lang="en-US" sz="900" dirty="0">
+                <a:solidFill>
+                  <a:srgbClr val="6B7785"/>
+                </a:solidFill>
+                <a:latin typeface="Malgun Gothic" pitchFamily="34" charset="0"/>
+                <a:ea typeface="Malgun Gothic" pitchFamily="34" charset="-122"/>
+                <a:cs typeface="Malgun Gothic" pitchFamily="34" charset="-120"/>
+              </a:rPr>
+              <a:t>비스듬히 찍힌 칩을 정원으로 펴는 원근 보정</a:t>
+            </a:r>
+            <a:endParaRPr lang="en-US" sz="900" dirty="0"/>
+          </a:p>
+        </p:txBody>
+      </p:sp>
+      <p:sp>
+        <p:nvSpPr>
+          <p:cNvPr id="46" name="Text 44"/>
+          <p:cNvSpPr/>
+          <p:nvPr/>
+        </p:nvSpPr>
+        <p:spPr>
+          <a:xfrm>
+            <a:off x="731520" y="5856732"/>
+            <a:ext cx="2377440" cy="297180"/>
+          </a:xfrm>
+          <a:prstGeom prst="rect">
+            <a:avLst/>
+          </a:prstGeom>
+          <a:noFill/>
+          <a:ln/>
+        </p:spPr>
+        <p:txBody>
+          <a:bodyPr wrap="square" rtlCol="0" anchor="t"/>
+          <a:lstStyle/>
+          <a:p>
+            <a:pPr indent="0" marL="0">
+              <a:buNone/>
+            </a:pPr>
+            <a:r>
+              <a:rPr lang="en-US" sz="1000" b="1" dirty="0">
+                <a:solidFill>
+                  <a:srgbClr val="1A2B3C"/>
+                </a:solidFill>
+                <a:latin typeface="Malgun Gothic" pitchFamily="34" charset="0"/>
+                <a:ea typeface="Malgun Gothic" pitchFamily="34" charset="-122"/>
+                <a:cs typeface="Malgun Gothic" pitchFamily="34" charset="-120"/>
+              </a:rPr>
+              <a:t>OpenCV</a:t>
+            </a:r>
+            <a:endParaRPr lang="en-US" sz="1000" dirty="0"/>
+          </a:p>
+        </p:txBody>
+      </p:sp>
+      <p:sp>
+        <p:nvSpPr>
+          <p:cNvPr id="47" name="Text 45"/>
+          <p:cNvSpPr/>
+          <p:nvPr/>
+        </p:nvSpPr>
+        <p:spPr>
+          <a:xfrm>
+            <a:off x="3154680" y="5856732"/>
+            <a:ext cx="2666848" cy="297180"/>
+          </a:xfrm>
+          <a:prstGeom prst="rect">
+            <a:avLst/>
+          </a:prstGeom>
+          <a:noFill/>
+          <a:ln/>
+        </p:spPr>
+        <p:txBody>
+          <a:bodyPr wrap="square" rtlCol="0" anchor="t"/>
+          <a:lstStyle/>
+          <a:p>
+            <a:pPr indent="0" marL="0">
+              <a:buNone/>
+            </a:pPr>
+            <a:r>
+              <a:rPr lang="en-US" sz="900" dirty="0">
+                <a:solidFill>
+                  <a:srgbClr val="6B7785"/>
+                </a:solidFill>
+                <a:latin typeface="Malgun Gothic" pitchFamily="34" charset="0"/>
+                <a:ea typeface="Malgun Gothic" pitchFamily="34" charset="-122"/>
+                <a:cs typeface="Malgun Gothic" pitchFamily="34" charset="-120"/>
+              </a:rPr>
+              <a:t>오픈소스 컴퓨터비전 라이브러리 — 모바일 영상 전처리 표준</a:t>
+            </a:r>
+            <a:endParaRPr lang="en-US" sz="900" dirty="0"/>
+          </a:p>
+        </p:txBody>
+      </p:sp>
+      <p:sp>
+        <p:nvSpPr>
+          <p:cNvPr id="48" name="Shape 46"/>
+          <p:cNvSpPr/>
+          <p:nvPr/>
+        </p:nvSpPr>
+        <p:spPr>
+          <a:xfrm>
+            <a:off x="6233008" y="4091940"/>
+            <a:ext cx="5501488" cy="2217420"/>
+          </a:xfrm>
+          <a:prstGeom prst="roundRect">
+            <a:avLst>
+              <a:gd name="adj" fmla="val 4124"/>
+            </a:avLst>
+          </a:prstGeom>
+          <a:solidFill>
+            <a:srgbClr val="FFFFFF"/>
+          </a:solidFill>
+          <a:ln w="9525">
+            <a:solidFill>
+              <a:srgbClr val="CFDCE2"/>
+            </a:solidFill>
+            <a:prstDash val="solid"/>
+          </a:ln>
+        </p:spPr>
+      </p:sp>
+      <p:sp>
+        <p:nvSpPr>
+          <p:cNvPr id="49" name="Shape 47"/>
+          <p:cNvSpPr/>
+          <p:nvPr/>
+        </p:nvSpPr>
+        <p:spPr>
+          <a:xfrm>
+            <a:off x="6233008" y="4091940"/>
+            <a:ext cx="109728" cy="2217420"/>
+          </a:xfrm>
+          <a:prstGeom prst="rect">
+            <a:avLst/>
+          </a:prstGeom>
+          <a:solidFill>
+            <a:srgbClr val="C77E1E"/>
+          </a:solidFill>
+          <a:ln w="12700">
+            <a:solidFill>
+              <a:srgbClr val="C77E1E"/>
+            </a:solidFill>
+            <a:prstDash val="solid"/>
+          </a:ln>
+        </p:spPr>
+      </p:sp>
+      <p:sp>
+        <p:nvSpPr>
+          <p:cNvPr id="50" name="Text 48"/>
+          <p:cNvSpPr/>
+          <p:nvPr/>
+        </p:nvSpPr>
+        <p:spPr>
+          <a:xfrm>
+            <a:off x="6507328" y="4229100"/>
+            <a:ext cx="5135728" cy="292608"/>
+          </a:xfrm>
+          <a:prstGeom prst="rect">
+            <a:avLst/>
+          </a:prstGeom>
+          <a:noFill/>
+          <a:ln/>
+        </p:spPr>
+        <p:txBody>
+          <a:bodyPr wrap="square" rtlCol="0" anchor="ctr"/>
+          <a:lstStyle/>
+          <a:p>
+            <a:pPr indent="0" marL="0">
+              <a:buNone/>
+            </a:pPr>
+            <a:r>
+              <a:rPr lang="en-US" sz="1300" b="1" spc="100" kern="0" dirty="0">
+                <a:solidFill>
+                  <a:srgbClr val="C77E1E"/>
+                </a:solidFill>
+                <a:latin typeface="Malgun Gothic" pitchFamily="34" charset="0"/>
+                <a:ea typeface="Malgun Gothic" pitchFamily="34" charset="-122"/>
+                <a:cs typeface="Malgun Gothic" pitchFamily="34" charset="-120"/>
+              </a:rPr>
+              <a:t>Platform · App</a:t>
+            </a:r>
+            <a:endParaRPr lang="en-US" sz="1300" dirty="0"/>
+          </a:p>
+        </p:txBody>
+      </p:sp>
+      <p:sp>
+        <p:nvSpPr>
+          <p:cNvPr id="51" name="Text 49"/>
+          <p:cNvSpPr/>
+          <p:nvPr/>
+        </p:nvSpPr>
+        <p:spPr>
+          <a:xfrm>
+            <a:off x="6507328" y="4594860"/>
+            <a:ext cx="2377440" cy="297180"/>
+          </a:xfrm>
+          <a:prstGeom prst="rect">
+            <a:avLst/>
+          </a:prstGeom>
+          <a:noFill/>
+          <a:ln/>
+        </p:spPr>
+        <p:txBody>
+          <a:bodyPr wrap="square" rtlCol="0" anchor="t"/>
+          <a:lstStyle/>
+          <a:p>
+            <a:pPr indent="0" marL="0">
+              <a:buNone/>
+            </a:pPr>
+            <a:r>
+              <a:rPr lang="en-US" sz="1000" b="1" dirty="0">
+                <a:solidFill>
+                  <a:srgbClr val="1A2B3C"/>
+                </a:solidFill>
+                <a:latin typeface="Malgun Gothic" pitchFamily="34" charset="0"/>
+                <a:ea typeface="Malgun Gothic" pitchFamily="34" charset="-122"/>
+                <a:cs typeface="Malgun Gothic" pitchFamily="34" charset="-120"/>
+              </a:rPr>
+              <a:t>PoC</a:t>
+            </a:r>
+            <a:endParaRPr lang="en-US" sz="1000" dirty="0"/>
+          </a:p>
+        </p:txBody>
+      </p:sp>
+      <p:sp>
+        <p:nvSpPr>
+          <p:cNvPr id="52" name="Text 50"/>
+          <p:cNvSpPr/>
+          <p:nvPr/>
+        </p:nvSpPr>
+        <p:spPr>
+          <a:xfrm>
+            <a:off x="8930488" y="4594860"/>
+            <a:ext cx="2666848" cy="297180"/>
+          </a:xfrm>
+          <a:prstGeom prst="rect">
+            <a:avLst/>
+          </a:prstGeom>
+          <a:noFill/>
+          <a:ln/>
+        </p:spPr>
+        <p:txBody>
+          <a:bodyPr wrap="square" rtlCol="0" anchor="t"/>
+          <a:lstStyle/>
+          <a:p>
+            <a:pPr indent="0" marL="0">
+              <a:buNone/>
+            </a:pPr>
+            <a:r>
+              <a:rPr lang="en-US" sz="900" dirty="0">
+                <a:solidFill>
+                  <a:srgbClr val="6B7785"/>
+                </a:solidFill>
+                <a:latin typeface="Malgun Gothic" pitchFamily="34" charset="0"/>
+                <a:ea typeface="Malgun Gothic" pitchFamily="34" charset="-122"/>
+                <a:cs typeface="Malgun Gothic" pitchFamily="34" charset="-120"/>
+              </a:rPr>
+              <a:t>Proof of Concept — 기술 개념 검증용 시제품 (현재 데모)</a:t>
+            </a:r>
+            <a:endParaRPr lang="en-US" sz="900" dirty="0"/>
+          </a:p>
+        </p:txBody>
+      </p:sp>
+      <p:sp>
+        <p:nvSpPr>
+          <p:cNvPr id="53" name="Text 51"/>
+          <p:cNvSpPr/>
+          <p:nvPr/>
+        </p:nvSpPr>
+        <p:spPr>
+          <a:xfrm>
+            <a:off x="6507328" y="4910328"/>
+            <a:ext cx="2377440" cy="297180"/>
+          </a:xfrm>
+          <a:prstGeom prst="rect">
+            <a:avLst/>
+          </a:prstGeom>
+          <a:noFill/>
+          <a:ln/>
+        </p:spPr>
+        <p:txBody>
+          <a:bodyPr wrap="square" rtlCol="0" anchor="t"/>
+          <a:lstStyle/>
+          <a:p>
+            <a:pPr indent="0" marL="0">
+              <a:buNone/>
+            </a:pPr>
+            <a:r>
+              <a:rPr lang="en-US" sz="1000" b="1" dirty="0">
+                <a:solidFill>
+                  <a:srgbClr val="1A2B3C"/>
+                </a:solidFill>
+                <a:latin typeface="Malgun Gothic" pitchFamily="34" charset="0"/>
+                <a:ea typeface="Malgun Gothic" pitchFamily="34" charset="-122"/>
+                <a:cs typeface="Malgun Gothic" pitchFamily="34" charset="-120"/>
+              </a:rPr>
+              <a:t>PWA</a:t>
+            </a:r>
+            <a:endParaRPr lang="en-US" sz="1000" dirty="0"/>
+          </a:p>
+        </p:txBody>
+      </p:sp>
+      <p:sp>
+        <p:nvSpPr>
+          <p:cNvPr id="54" name="Text 52"/>
+          <p:cNvSpPr/>
+          <p:nvPr/>
+        </p:nvSpPr>
+        <p:spPr>
+          <a:xfrm>
+            <a:off x="8930488" y="4910328"/>
+            <a:ext cx="2666848" cy="297180"/>
+          </a:xfrm>
+          <a:prstGeom prst="rect">
+            <a:avLst/>
+          </a:prstGeom>
+          <a:noFill/>
+          <a:ln/>
+        </p:spPr>
+        <p:txBody>
+          <a:bodyPr wrap="square" rtlCol="0" anchor="t"/>
+          <a:lstStyle/>
+          <a:p>
+            <a:pPr indent="0" marL="0">
+              <a:buNone/>
+            </a:pPr>
+            <a:r>
+              <a:rPr lang="en-US" sz="900" dirty="0">
+                <a:solidFill>
+                  <a:srgbClr val="6B7785"/>
+                </a:solidFill>
+                <a:latin typeface="Malgun Gothic" pitchFamily="34" charset="0"/>
+                <a:ea typeface="Malgun Gothic" pitchFamily="34" charset="-122"/>
+                <a:cs typeface="Malgun Gothic" pitchFamily="34" charset="-120"/>
+              </a:rPr>
+              <a:t>Progressive Web App — 설치 가능한 웹 기반 앱</a:t>
+            </a:r>
+            <a:endParaRPr lang="en-US" sz="900" dirty="0"/>
+          </a:p>
+        </p:txBody>
+      </p:sp>
+      <p:sp>
+        <p:nvSpPr>
+          <p:cNvPr id="55" name="Text 53"/>
+          <p:cNvSpPr/>
+          <p:nvPr/>
+        </p:nvSpPr>
+        <p:spPr>
+          <a:xfrm>
+            <a:off x="6507328" y="5225796"/>
+            <a:ext cx="2377440" cy="297180"/>
+          </a:xfrm>
+          <a:prstGeom prst="rect">
+            <a:avLst/>
+          </a:prstGeom>
+          <a:noFill/>
+          <a:ln/>
+        </p:spPr>
+        <p:txBody>
+          <a:bodyPr wrap="square" rtlCol="0" anchor="t"/>
+          <a:lstStyle/>
+          <a:p>
+            <a:pPr indent="0" marL="0">
+              <a:buNone/>
+            </a:pPr>
+            <a:r>
+              <a:rPr lang="en-US" sz="1000" b="1" dirty="0">
+                <a:solidFill>
+                  <a:srgbClr val="1A2B3C"/>
+                </a:solidFill>
+                <a:latin typeface="Malgun Gothic" pitchFamily="34" charset="0"/>
+                <a:ea typeface="Malgun Gothic" pitchFamily="34" charset="-122"/>
+                <a:cs typeface="Malgun Gothic" pitchFamily="34" charset="-120"/>
+              </a:rPr>
+              <a:t>TFJS / TFLite / Core ML</a:t>
+            </a:r>
+            <a:endParaRPr lang="en-US" sz="1000" dirty="0"/>
+          </a:p>
+        </p:txBody>
+      </p:sp>
+      <p:sp>
+        <p:nvSpPr>
+          <p:cNvPr id="56" name="Text 54"/>
+          <p:cNvSpPr/>
+          <p:nvPr/>
+        </p:nvSpPr>
+        <p:spPr>
+          <a:xfrm>
+            <a:off x="8930488" y="5225796"/>
+            <a:ext cx="2666848" cy="297180"/>
+          </a:xfrm>
+          <a:prstGeom prst="rect">
+            <a:avLst/>
+          </a:prstGeom>
+          <a:noFill/>
+          <a:ln/>
+        </p:spPr>
+        <p:txBody>
+          <a:bodyPr wrap="square" rtlCol="0" anchor="t"/>
+          <a:lstStyle/>
+          <a:p>
+            <a:pPr indent="0" marL="0">
+              <a:buNone/>
+            </a:pPr>
+            <a:r>
+              <a:rPr lang="en-US" sz="900" dirty="0">
+                <a:solidFill>
+                  <a:srgbClr val="6B7785"/>
+                </a:solidFill>
+                <a:latin typeface="Malgun Gothic" pitchFamily="34" charset="0"/>
+                <a:ea typeface="Malgun Gothic" pitchFamily="34" charset="-122"/>
+                <a:cs typeface="Malgun Gothic" pitchFamily="34" charset="-120"/>
+              </a:rPr>
+              <a:t>TensorFlow.js (브라우저) / TensorFlow Lite (Android) / Core ML (iOS) 추론 엔진</a:t>
+            </a:r>
+            <a:endParaRPr lang="en-US" sz="900" dirty="0"/>
+          </a:p>
+        </p:txBody>
+      </p:sp>
+      <p:sp>
+        <p:nvSpPr>
+          <p:cNvPr id="57" name="Text 55"/>
+          <p:cNvSpPr/>
+          <p:nvPr/>
+        </p:nvSpPr>
+        <p:spPr>
+          <a:xfrm>
+            <a:off x="6507328" y="5541264"/>
+            <a:ext cx="2377440" cy="297180"/>
+          </a:xfrm>
+          <a:prstGeom prst="rect">
+            <a:avLst/>
+          </a:prstGeom>
+          <a:noFill/>
+          <a:ln/>
+        </p:spPr>
+        <p:txBody>
+          <a:bodyPr wrap="square" rtlCol="0" anchor="t"/>
+          <a:lstStyle/>
+          <a:p>
+            <a:pPr indent="0" marL="0">
+              <a:buNone/>
+            </a:pPr>
+            <a:r>
+              <a:rPr lang="en-US" sz="1000" b="1" dirty="0">
+                <a:solidFill>
+                  <a:srgbClr val="1A2B3C"/>
+                </a:solidFill>
+                <a:latin typeface="Malgun Gothic" pitchFamily="34" charset="0"/>
+                <a:ea typeface="Malgun Gothic" pitchFamily="34" charset="-122"/>
+                <a:cs typeface="Malgun Gothic" pitchFamily="34" charset="-120"/>
+              </a:rPr>
+              <a:t>Camera2 / AVFoundation</a:t>
+            </a:r>
+            <a:endParaRPr lang="en-US" sz="1000" dirty="0"/>
+          </a:p>
+        </p:txBody>
+      </p:sp>
+      <p:sp>
+        <p:nvSpPr>
+          <p:cNvPr id="58" name="Text 56"/>
+          <p:cNvSpPr/>
+          <p:nvPr/>
+        </p:nvSpPr>
+        <p:spPr>
+          <a:xfrm>
+            <a:off x="8930488" y="5541264"/>
+            <a:ext cx="2666848" cy="297180"/>
+          </a:xfrm>
+          <a:prstGeom prst="rect">
+            <a:avLst/>
+          </a:prstGeom>
+          <a:noFill/>
+          <a:ln/>
+        </p:spPr>
+        <p:txBody>
+          <a:bodyPr wrap="square" rtlCol="0" anchor="t"/>
+          <a:lstStyle/>
+          <a:p>
+            <a:pPr indent="0" marL="0">
+              <a:buNone/>
+            </a:pPr>
+            <a:r>
+              <a:rPr lang="en-US" sz="900" dirty="0">
+                <a:solidFill>
+                  <a:srgbClr val="6B7785"/>
+                </a:solidFill>
+                <a:latin typeface="Malgun Gothic" pitchFamily="34" charset="0"/>
+                <a:ea typeface="Malgun Gothic" pitchFamily="34" charset="-122"/>
+                <a:cs typeface="Malgun Gothic" pitchFamily="34" charset="-120"/>
+              </a:rPr>
+              <a:t>Android · iOS의 카메라 정밀 제어 공식 API</a:t>
+            </a:r>
+            <a:endParaRPr lang="en-US" sz="900" dirty="0"/>
+          </a:p>
+        </p:txBody>
+      </p:sp>
+      <p:sp>
+        <p:nvSpPr>
+          <p:cNvPr id="59" name="Text 57"/>
+          <p:cNvSpPr/>
+          <p:nvPr/>
+        </p:nvSpPr>
+        <p:spPr>
+          <a:xfrm>
+            <a:off x="6507328" y="5856732"/>
+            <a:ext cx="2377440" cy="297180"/>
+          </a:xfrm>
+          <a:prstGeom prst="rect">
+            <a:avLst/>
+          </a:prstGeom>
+          <a:noFill/>
+          <a:ln/>
+        </p:spPr>
+        <p:txBody>
+          <a:bodyPr wrap="square" rtlCol="0" anchor="t"/>
+          <a:lstStyle/>
+          <a:p>
+            <a:pPr indent="0" marL="0">
+              <a:buNone/>
+            </a:pPr>
+            <a:r>
+              <a:rPr lang="en-US" sz="1000" b="1" dirty="0">
+                <a:solidFill>
+                  <a:srgbClr val="1A2B3C"/>
+                </a:solidFill>
+                <a:latin typeface="Malgun Gothic" pitchFamily="34" charset="0"/>
+                <a:ea typeface="Malgun Gothic" pitchFamily="34" charset="-122"/>
+                <a:cs typeface="Malgun Gothic" pitchFamily="34" charset="-120"/>
+              </a:rPr>
+              <a:t>SDK</a:t>
+            </a:r>
+            <a:endParaRPr lang="en-US" sz="1000" dirty="0"/>
+          </a:p>
+        </p:txBody>
+      </p:sp>
+      <p:sp>
+        <p:nvSpPr>
+          <p:cNvPr id="60" name="Text 58"/>
+          <p:cNvSpPr/>
+          <p:nvPr/>
+        </p:nvSpPr>
+        <p:spPr>
+          <a:xfrm>
+            <a:off x="8930488" y="5856732"/>
+            <a:ext cx="2666848" cy="297180"/>
+          </a:xfrm>
+          <a:prstGeom prst="rect">
+            <a:avLst/>
+          </a:prstGeom>
+          <a:noFill/>
+          <a:ln/>
+        </p:spPr>
+        <p:txBody>
+          <a:bodyPr wrap="square" rtlCol="0" anchor="t"/>
+          <a:lstStyle/>
+          <a:p>
+            <a:pPr indent="0" marL="0">
+              <a:buNone/>
+            </a:pPr>
+            <a:r>
+              <a:rPr lang="en-US" sz="900" dirty="0">
+                <a:solidFill>
+                  <a:srgbClr val="6B7785"/>
+                </a:solidFill>
+                <a:latin typeface="Malgun Gothic" pitchFamily="34" charset="0"/>
+                <a:ea typeface="Malgun Gothic" pitchFamily="34" charset="-122"/>
+                <a:cs typeface="Malgun Gothic" pitchFamily="34" charset="-120"/>
+              </a:rPr>
+              <a:t>Software Development Kit — 외부 개발자가 쓸 수 있게 만든 기능 묶음</a:t>
             </a:r>
             <a:endParaRPr lang="en-US" sz="900" dirty="0"/>
           </a:p>
